--- a/presentations/EL_L01_ImpactDesk_Lesson.pptx
+++ b/presentations/EL_L01_ImpactDesk_Lesson.pptx
@@ -19,9 +19,11 @@
     <p:sldId id="267" r:id="rId13"/>
     <p:sldId id="268" r:id="rId14"/>
     <p:sldId id="269" r:id="rId15"/>
+    <p:sldId id="270" r:id="rId16"/>
+    <p:sldId id="271" r:id="rId17"/>
   </p:sldIdLst>
   <p:notesMasterIdLst>
-    <p:notesMasterId r:id="rId16"/>
+    <p:notesMasterId r:id="rId18"/>
   </p:notesMasterIdLst>
   <p:sldSz cx="12192000" cy="6858000"/>
   <p:notesSz cx="6858000" cy="12192000"/>
@@ -692,7 +694,10 @@
           <a:p>
             <a:r>
               <a:rPr lang="en-US" dirty="0"/>
-              <a:t>Make them commit to an answer on paper before they tap the star. Guessing first costs them the learning.</a:t>
+              <a:t>Work this through at the front, thinking aloud, before anyone starts their own. Build it in the order of the panels and do not show the finished paragraph until the class has heard the thinking that produced it.
+The scenario is deliberately not one anybody is about to write about: the station challenges are pupil typing, piracy and lunch-payment facial recognition, and the exam practice is town-centre facial recognition. Pupils cannot copy this answer into any of them.
+The move worth naming out loud is the last sentence. A conclusion that picks a side and gives a reason is what separates the top band from a list of impacts. Ask the class for a different conclusion, defended, before moving on - there is more than one that earns the marks.
+Say this out loud: Watch which part takes me longest. It is not naming the impacts - it is saying who is affected and why that matters.</a:t>
             </a:r>
             <a:endParaRPr lang="en-US" dirty="0"/>
           </a:p>
@@ -780,7 +785,13 @@
           <a:p>
             <a:r>
               <a:rPr lang="en-US" dirty="0"/>
-              <a:t>Use these as a settler, or as something for early finishers to read in the experience.</a:t>
+              <a:t>The answer is D: They ask you to weigh competing points and reach a justified conclusion.
+Do not say it yet. Every pupil commits first - fingers, whiteboards or a show of hands on each letter in turn - and you count the split before anyone can change their mind.
+IF MOST OF THE CLASS IS RIGHT: say why it is right in one sentence and go straight on to the independent work.
+IF A SIGNIFICANT GROUP IS ON ONE WRONG LETTER: that option is the misconception to teach against before anyone goes on. Go back to station 3, Two sides of an argument, and work through its example again, aloud, with the class watching, then re-ask this question.
+The course's own response to a wrong answer here: Marks come from the reasoning, not the length.
+A limitation, stated rather than papered over: one response covers every wrong option; it does not say what to revisit for each one. The course does not record what each separate wrong option means, and this slide does not invent it. Decide your own reteach for each option before the lesson; the options above are the start of it.
+This is a real activity from the experience (el-l01-s3-c2), so the wording here is the wording a pupil will see.</a:t>
             </a:r>
             <a:endParaRPr lang="en-US" dirty="0"/>
           </a:p>
@@ -868,7 +879,7 @@
           <a:p>
             <a:r>
               <a:rPr lang="en-US" dirty="0"/>
-              <a:t>Timed and silent. Mark against the answer sheet, then ask students to record their weakest area.</a:t>
+              <a:t>Make them commit to an answer on paper before they tap the star. Guessing first costs them the learning.</a:t>
             </a:r>
             <a:endParaRPr lang="en-US" dirty="0"/>
           </a:p>
@@ -956,7 +967,7 @@
           <a:p>
             <a:r>
               <a:rPr lang="en-US" dirty="0"/>
-              <a:t>Students copy their score-screen breakdown onto the worksheet, then rate themselves here.</a:t>
+              <a:t>Use these as a settler, or as something for early finishers to read in the experience.</a:t>
             </a:r>
             <a:endParaRPr lang="en-US" dirty="0"/>
           </a:p>
@@ -980,6 +991,182 @@
             <a:fld id="{F7021451-1387-4CA6-816F-3879F97B5CBC}" type="slidenum">
               <a:rPr lang="en-US"/>
               <a:t>14</a:t>
+            </a:fld>
+            <a:endParaRPr lang="en-US"/>
+          </a:p>
+        </p:txBody>
+      </p:sp>
+    </p:spTree>
+    <p:extLst>
+      <p:ext uri="{BB962C8B-B14F-4D97-AF65-F5344CB8AC3E}">
+        <p14:creationId xmlns:p14="http://schemas.microsoft.com/office/powerpoint/2010/main" val="1024086991"/>
+      </p:ext>
+    </p:extLst>
+  </p:cSld>
+  <p:clrMapOvr>
+    <a:masterClrMapping/>
+  </p:clrMapOvr>
+</p:notes>
+</file>
+
+<file path=ppt/notesSlides/notesSlide15.xml><?xml version="1.0" encoding="utf-8"?>
+<p:notes xmlns:a="http://schemas.openxmlformats.org/drawingml/2006/main" xmlns:r="http://schemas.openxmlformats.org/officeDocument/2006/relationships" xmlns:p="http://schemas.openxmlformats.org/presentationml/2006/main">
+  <p:cSld>
+    <p:spTree>
+      <p:nvGrpSpPr>
+        <p:cNvPr id="1" name=""/>
+        <p:cNvGrpSpPr/>
+        <p:nvPr/>
+      </p:nvGrpSpPr>
+      <p:grpSpPr>
+        <a:xfrm>
+          <a:off x="0" y="0"/>
+          <a:ext cx="0" cy="0"/>
+          <a:chOff x="0" y="0"/>
+          <a:chExt cx="0" cy="0"/>
+        </a:xfrm>
+      </p:grpSpPr>
+      <p:sp>
+        <p:nvSpPr>
+          <p:cNvPr id="2" name="Slide Image Placeholder 1"/>
+          <p:cNvSpPr>
+            <a:spLocks noGrp="1" noRot="1" noChangeAspect="1"/>
+          </p:cNvSpPr>
+          <p:nvPr>
+            <p:ph type="sldImg"/>
+          </p:nvPr>
+        </p:nvSpPr>
+        <p:spPr/>
+      </p:sp>
+      <p:sp>
+        <p:nvSpPr>
+          <p:cNvPr id="3" name="Notes Placeholder 2"/>
+          <p:cNvSpPr>
+            <a:spLocks noGrp="1"/>
+          </p:cNvSpPr>
+          <p:nvPr>
+            <p:ph type="body" idx="1"/>
+          </p:nvPr>
+        </p:nvSpPr>
+        <p:spPr/>
+        <p:txBody>
+          <a:bodyPr/>
+          <a:lstStyle/>
+          <a:p>
+            <a:r>
+              <a:rPr lang="en-US" dirty="0"/>
+              <a:t>Timed and silent. Mark against the answer sheet, then ask students to record their weakest area.</a:t>
+            </a:r>
+            <a:endParaRPr lang="en-US" dirty="0"/>
+          </a:p>
+        </p:txBody>
+      </p:sp>
+      <p:sp>
+        <p:nvSpPr>
+          <p:cNvPr id="4" name="Slide Number Placeholder 3"/>
+          <p:cNvSpPr>
+            <a:spLocks noGrp="1"/>
+          </p:cNvSpPr>
+          <p:nvPr>
+            <p:ph type="sldNum" sz="quarter" idx="10"/>
+          </p:nvPr>
+        </p:nvSpPr>
+        <p:spPr/>
+        <p:txBody>
+          <a:bodyPr/>
+          <a:lstStyle/>
+          <a:p>
+            <a:fld id="{F7021451-1387-4CA6-816F-3879F97B5CBC}" type="slidenum">
+              <a:rPr lang="en-US"/>
+              <a:t>15</a:t>
+            </a:fld>
+            <a:endParaRPr lang="en-US"/>
+          </a:p>
+        </p:txBody>
+      </p:sp>
+    </p:spTree>
+    <p:extLst>
+      <p:ext uri="{BB962C8B-B14F-4D97-AF65-F5344CB8AC3E}">
+        <p14:creationId xmlns:p14="http://schemas.microsoft.com/office/powerpoint/2010/main" val="1024086991"/>
+      </p:ext>
+    </p:extLst>
+  </p:cSld>
+  <p:clrMapOvr>
+    <a:masterClrMapping/>
+  </p:clrMapOvr>
+</p:notes>
+</file>
+
+<file path=ppt/notesSlides/notesSlide16.xml><?xml version="1.0" encoding="utf-8"?>
+<p:notes xmlns:a="http://schemas.openxmlformats.org/drawingml/2006/main" xmlns:r="http://schemas.openxmlformats.org/officeDocument/2006/relationships" xmlns:p="http://schemas.openxmlformats.org/presentationml/2006/main">
+  <p:cSld>
+    <p:spTree>
+      <p:nvGrpSpPr>
+        <p:cNvPr id="1" name=""/>
+        <p:cNvGrpSpPr/>
+        <p:nvPr/>
+      </p:nvGrpSpPr>
+      <p:grpSpPr>
+        <a:xfrm>
+          <a:off x="0" y="0"/>
+          <a:ext cx="0" cy="0"/>
+          <a:chOff x="0" y="0"/>
+          <a:chExt cx="0" cy="0"/>
+        </a:xfrm>
+      </p:grpSpPr>
+      <p:sp>
+        <p:nvSpPr>
+          <p:cNvPr id="2" name="Slide Image Placeholder 1"/>
+          <p:cNvSpPr>
+            <a:spLocks noGrp="1" noRot="1" noChangeAspect="1"/>
+          </p:cNvSpPr>
+          <p:nvPr>
+            <p:ph type="sldImg"/>
+          </p:nvPr>
+        </p:nvSpPr>
+        <p:spPr/>
+      </p:sp>
+      <p:sp>
+        <p:nvSpPr>
+          <p:cNvPr id="3" name="Notes Placeholder 2"/>
+          <p:cNvSpPr>
+            <a:spLocks noGrp="1"/>
+          </p:cNvSpPr>
+          <p:nvPr>
+            <p:ph type="body" idx="1"/>
+          </p:nvPr>
+        </p:nvSpPr>
+        <p:spPr/>
+        <p:txBody>
+          <a:bodyPr/>
+          <a:lstStyle/>
+          <a:p>
+            <a:r>
+              <a:rPr lang="en-US" dirty="0"/>
+              <a:t>Students copy their score-screen breakdown onto the worksheet, then rate themselves here.</a:t>
+            </a:r>
+            <a:endParaRPr lang="en-US" dirty="0"/>
+          </a:p>
+        </p:txBody>
+      </p:sp>
+      <p:sp>
+        <p:nvSpPr>
+          <p:cNvPr id="4" name="Slide Number Placeholder 3"/>
+          <p:cNvSpPr>
+            <a:spLocks noGrp="1"/>
+          </p:cNvSpPr>
+          <p:nvPr>
+            <p:ph type="sldNum" sz="quarter" idx="10"/>
+          </p:nvPr>
+        </p:nvSpPr>
+        <p:spPr/>
+        <p:txBody>
+          <a:bodyPr/>
+          <a:lstStyle/>
+          <a:p>
+            <a:fld id="{F7021451-1387-4CA6-816F-3879F97B5CBC}" type="slidenum">
+              <a:rPr lang="en-US"/>
+              <a:t>16</a:t>
             </a:fld>
             <a:endParaRPr lang="en-US"/>
           </a:p>
@@ -2943,75 +3130,14 @@
       </p:sp>
       <p:sp>
         <p:nvSpPr>
-          <p:cNvPr id="5" name="Shape 3"/>
-          <p:cNvSpPr/>
-          <p:nvPr/>
-        </p:nvSpPr>
-        <p:spPr>
-          <a:xfrm>
-            <a:off x="502920" y="438912"/>
-            <a:ext cx="3108960" cy="502920"/>
-          </a:xfrm>
-          <a:prstGeom prst="roundRect">
-            <a:avLst>
-              <a:gd name="adj" fmla="val 18182"/>
-            </a:avLst>
-          </a:prstGeom>
-          <a:solidFill>
-            <a:srgbClr val="F4B942"/>
-          </a:solidFill>
-          <a:ln/>
-        </p:spPr>
-      </p:sp>
-      <p:sp>
-        <p:nvSpPr>
-          <p:cNvPr id="6" name="Text 4"/>
-          <p:cNvSpPr txBox="1"/>
-          <p:nvPr/>
-        </p:nvSpPr>
-        <p:spPr>
-          <a:xfrm>
-            <a:off x="502920" y="438912"/>
-            <a:ext cx="3108960" cy="502920"/>
-          </a:xfrm>
-          <a:prstGeom prst="rect">
-            <a:avLst/>
-          </a:prstGeom>
-          <a:noFill/>
-          <a:ln/>
-        </p:spPr>
-        <p:txBody>
-          <a:bodyPr wrap="square" lIns="0" tIns="0" rIns="0" bIns="0" rtlCol="0" anchor="ctr"/>
-          <a:lstStyle/>
-          <a:p>
-            <a:pPr algn="ctr" indent="0" marL="0">
-              <a:buNone/>
-            </a:pPr>
-            <a:r>
-              <a:rPr lang="en-US" sz="1300" b="1" dirty="0">
-                <a:solidFill>
-                  <a:srgbClr val="101828"/>
-                </a:solidFill>
-                <a:latin typeface="IBM Plex Mono" pitchFamily="34" charset="0"/>
-                <a:ea typeface="IBM Plex Mono" pitchFamily="34" charset="-122"/>
-                <a:cs typeface="IBM Plex Mono" pitchFamily="34" charset="-120"/>
-              </a:rPr>
-              <a:t>★  FINAL CHALLENGE</a:t>
-            </a:r>
-            <a:endParaRPr lang="en-US" sz="1300" dirty="0"/>
-          </a:p>
-        </p:txBody>
-      </p:sp>
-      <p:sp>
-        <p:nvSpPr>
-          <p:cNvPr id="7" name="Text 5"/>
-          <p:cNvSpPr txBox="1"/>
-          <p:nvPr/>
-        </p:nvSpPr>
-        <p:spPr>
-          <a:xfrm>
-            <a:off x="502920" y="1097280"/>
-            <a:ext cx="11155680" cy="731520"/>
+          <p:cNvPr id="5" name="Text 3"/>
+          <p:cNvSpPr txBox="1"/>
+          <p:nvPr/>
+        </p:nvSpPr>
+        <p:spPr>
+          <a:xfrm>
+            <a:off x="502920" y="411480"/>
+            <a:ext cx="11155680" cy="777240"/>
           </a:xfrm>
           <a:prstGeom prst="rect">
             <a:avLst/>
@@ -3027,7 +3153,7 @@
               <a:buNone/>
             </a:pPr>
             <a:r>
-              <a:rPr lang="en-US" sz="3400" b="1" dirty="0">
+              <a:rPr lang="en-US" sz="3200" b="1" dirty="0">
                 <a:solidFill>
                   <a:srgbClr val="101828"/>
                 </a:solidFill>
@@ -3035,26 +3161,65 @@
                 <a:ea typeface="IBM Plex Sans" pitchFamily="34" charset="-122"/>
                 <a:cs typeface="IBM Plex Sans" pitchFamily="34" charset="-120"/>
               </a:rPr>
-              <a:t>Sort the impacts</a:t>
-            </a:r>
-            <a:endParaRPr lang="en-US" sz="3400" dirty="0"/>
-          </a:p>
-        </p:txBody>
-      </p:sp>
-      <p:sp>
-        <p:nvSpPr>
-          <p:cNvPr id="8" name="Shape 6"/>
+              <a:t>Watch me answer an eight-mark one</a:t>
+            </a:r>
+            <a:endParaRPr lang="en-US" sz="3200" dirty="0"/>
+          </a:p>
+        </p:txBody>
+      </p:sp>
+      <p:sp>
+        <p:nvSpPr>
+          <p:cNvPr id="6" name="Text 4"/>
+          <p:cNvSpPr txBox="1"/>
+          <p:nvPr/>
+        </p:nvSpPr>
+        <p:spPr>
+          <a:xfrm>
+            <a:off x="502920" y="1170432"/>
+            <a:ext cx="11155680" cy="411480"/>
+          </a:xfrm>
+          <a:prstGeom prst="rect">
+            <a:avLst/>
+          </a:prstGeom>
+          <a:noFill/>
+          <a:ln/>
+        </p:spPr>
+        <p:txBody>
+          <a:bodyPr wrap="square" lIns="0" tIns="0" rIns="0" bIns="0" rtlCol="0" anchor="ctr"/>
+          <a:lstStyle/>
+          <a:p>
+            <a:pPr indent="0" marL="0">
+              <a:buNone/>
+            </a:pPr>
+            <a:r>
+              <a:rPr lang="en-US" sz="1500" dirty="0">
+                <a:solidFill>
+                  <a:srgbClr val="667085"/>
+                </a:solidFill>
+                <a:latin typeface="IBM Plex Sans" pitchFamily="34" charset="0"/>
+                <a:ea typeface="IBM Plex Sans" pitchFamily="34" charset="-122"/>
+                <a:cs typeface="IBM Plex Sans" pitchFamily="34" charset="-120"/>
+              </a:rPr>
+              <a:t>A different question from yours, so you get the method and not the answer</a:t>
+            </a:r>
+            <a:endParaRPr lang="en-US" sz="1500" dirty="0"/>
+          </a:p>
+        </p:txBody>
+      </p:sp>
+      <p:sp>
+        <p:nvSpPr>
+          <p:cNvPr id="7" name="Shape 5"/>
           <p:cNvSpPr/>
           <p:nvPr/>
         </p:nvSpPr>
         <p:spPr>
           <a:xfrm>
-            <a:off x="502920" y="2011680"/>
-            <a:ext cx="11155680" cy="2194560"/>
+            <a:off x="502920" y="1737360"/>
+            <a:ext cx="3566160" cy="2377440"/>
           </a:xfrm>
           <a:prstGeom prst="roundRect">
             <a:avLst>
-              <a:gd name="adj" fmla="val 5000"/>
+              <a:gd name="adj" fmla="val 4615"/>
             </a:avLst>
           </a:prstGeom>
           <a:solidFill>
@@ -3062,7 +3227,7 @@
           </a:solidFill>
           <a:ln w="15875">
             <a:solidFill>
-              <a:srgbClr val="2D63FF"/>
+              <a:srgbClr val="D9DEE7"/>
             </a:solidFill>
             <a:prstDash val="solid"/>
           </a:ln>
@@ -3070,33 +3235,72 @@
       </p:sp>
       <p:sp>
         <p:nvSpPr>
+          <p:cNvPr id="8" name="Text 6"/>
+          <p:cNvSpPr txBox="1"/>
+          <p:nvPr/>
+        </p:nvSpPr>
+        <p:spPr>
+          <a:xfrm>
+            <a:off x="777240" y="1901952"/>
+            <a:ext cx="3017520" cy="292608"/>
+          </a:xfrm>
+          <a:prstGeom prst="rect">
+            <a:avLst/>
+          </a:prstGeom>
+          <a:noFill/>
+          <a:ln/>
+        </p:spPr>
+        <p:txBody>
+          <a:bodyPr wrap="square" lIns="0" tIns="0" rIns="0" bIns="0" rtlCol="0" anchor="ctr"/>
+          <a:lstStyle/>
+          <a:p>
+            <a:pPr indent="0" marL="0">
+              <a:buNone/>
+            </a:pPr>
+            <a:r>
+              <a:rPr lang="en-US" sz="1100" b="1" dirty="0">
+                <a:solidFill>
+                  <a:srgbClr val="667085"/>
+                </a:solidFill>
+                <a:latin typeface="IBM Plex Mono" pitchFamily="34" charset="0"/>
+                <a:ea typeface="IBM Plex Mono" pitchFamily="34" charset="-122"/>
+                <a:cs typeface="IBM Plex Mono" pitchFamily="34" charset="-120"/>
+              </a:rPr>
+              <a:t>THE QUESTION</a:t>
+            </a:r>
+            <a:endParaRPr lang="en-US" sz="1100" dirty="0"/>
+          </a:p>
+        </p:txBody>
+      </p:sp>
+      <p:sp>
+        <p:nvSpPr>
           <p:cNvPr id="9" name="Text 7"/>
           <p:cNvSpPr txBox="1"/>
           <p:nvPr/>
         </p:nvSpPr>
         <p:spPr>
           <a:xfrm>
-            <a:off x="1005840" y="2331720"/>
-            <a:ext cx="10149840" cy="1554480"/>
-          </a:xfrm>
-          <a:prstGeom prst="rect">
-            <a:avLst/>
-          </a:prstGeom>
-          <a:noFill/>
-          <a:ln/>
-        </p:spPr>
-        <p:txBody>
-          <a:bodyPr wrap="square" lIns="0" tIns="0" rIns="0" bIns="0" rtlCol="0" anchor="ctr"/>
+            <a:off x="777240" y="2249424"/>
+            <a:ext cx="3017520" cy="1719072"/>
+          </a:xfrm>
+          <a:prstGeom prst="rect">
+            <a:avLst/>
+          </a:prstGeom>
+          <a:noFill/>
+          <a:ln/>
+        </p:spPr>
+        <p:txBody>
+          <a:bodyPr wrap="square" lIns="0" tIns="0" rIns="0" bIns="0" rtlCol="0" anchor="t"/>
           <a:lstStyle/>
           <a:p>
             <a:pPr indent="0" marL="0">
               <a:lnSpc>
-                <a:spcPct val="130000"/>
+                <a:spcPct val="118000"/>
               </a:lnSpc>
               <a:buNone/>
             </a:pPr>
             <a:r>
-              <a:rPr lang="en-US" sz="2200" dirty="0">
+              <a:rPr lang="en-US" sz="1100" dirty="0">
                 <a:solidFill>
                   <a:srgbClr val="101828"/>
                 </a:solidFill>
@@ -3104,48 +3308,518 @@
                 <a:ea typeface="IBM Plex Sans" pitchFamily="34" charset="-122"/>
                 <a:cs typeface="IBM Plex Sans" pitchFamily="34" charset="-120"/>
               </a:rPr>
-              <a:t>Eight concerns about new technologies. Tap the star and sort each into the kind of impact it is.</a:t>
-            </a:r>
-            <a:endParaRPr lang="en-US" sz="2200" dirty="0"/>
-          </a:p>
-        </p:txBody>
-      </p:sp>
-      <p:sp>
-        <p:nvSpPr>
-          <p:cNvPr id="10" name="Text 8"/>
-          <p:cNvSpPr txBox="1"/>
-          <p:nvPr/>
-        </p:nvSpPr>
-        <p:spPr>
-          <a:xfrm>
-            <a:off x="502920" y="4526280"/>
-            <a:ext cx="11155680" cy="457200"/>
-          </a:xfrm>
-          <a:prstGeom prst="rect">
-            <a:avLst/>
-          </a:prstGeom>
-          <a:noFill/>
-          <a:ln/>
-        </p:spPr>
-        <p:txBody>
-          <a:bodyPr wrap="square" lIns="0" tIns="0" rIns="0" bIns="0" rtlCol="0" anchor="ctr"/>
-          <a:lstStyle/>
+              <a:t>A bank is closing the last branch in a town. Everything moves to its app.</a:t>
+            </a:r>
+            <a:endParaRPr lang="en-US" sz="1100" dirty="0"/>
+          </a:p>
           <a:p>
             <a:pPr indent="0" marL="0">
-              <a:buNone/>
-            </a:pPr>
-            <a:r>
-              <a:rPr lang="en-US" sz="1600" dirty="0">
-                <a:solidFill>
-                  <a:srgbClr val="667085"/>
+              <a:lnSpc>
+                <a:spcPct val="118000"/>
+              </a:lnSpc>
+              <a:buNone/>
+            </a:pPr>
+            <a:endParaRPr lang="en-US" sz="1100" dirty="0"/>
+          </a:p>
+          <a:p>
+            <a:pPr indent="0" marL="0">
+              <a:lnSpc>
+                <a:spcPct val="118000"/>
+              </a:lnSpc>
+              <a:buNone/>
+            </a:pPr>
+            <a:r>
+              <a:rPr lang="en-US" sz="1100" dirty="0">
+                <a:solidFill>
+                  <a:srgbClr val="101828"/>
                 </a:solidFill>
                 <a:latin typeface="IBM Plex Sans" pitchFamily="34" charset="0"/>
                 <a:ea typeface="IBM Plex Sans" pitchFamily="34" charset="-122"/>
                 <a:cs typeface="IBM Plex Sans" pitchFamily="34" charset="-120"/>
               </a:rPr>
-              <a:t>Predict on paper first, then look down and test it.</a:t>
-            </a:r>
-            <a:endParaRPr lang="en-US" sz="1600" dirty="0"/>
+              <a:t>Discuss the impacts of this decision.  [8]</a:t>
+            </a:r>
+            <a:endParaRPr lang="en-US" sz="1100" dirty="0"/>
+          </a:p>
+        </p:txBody>
+      </p:sp>
+      <p:sp>
+        <p:nvSpPr>
+          <p:cNvPr id="10" name="Shape 8"/>
+          <p:cNvSpPr/>
+          <p:nvPr/>
+        </p:nvSpPr>
+        <p:spPr>
+          <a:xfrm>
+            <a:off x="4297680" y="1737360"/>
+            <a:ext cx="3566160" cy="2377440"/>
+          </a:xfrm>
+          <a:prstGeom prst="roundRect">
+            <a:avLst>
+              <a:gd name="adj" fmla="val 4615"/>
+            </a:avLst>
+          </a:prstGeom>
+          <a:solidFill>
+            <a:srgbClr val="FFFFFF"/>
+          </a:solidFill>
+          <a:ln w="15875">
+            <a:solidFill>
+              <a:srgbClr val="D9DEE7"/>
+            </a:solidFill>
+            <a:prstDash val="solid"/>
+          </a:ln>
+        </p:spPr>
+      </p:sp>
+      <p:sp>
+        <p:nvSpPr>
+          <p:cNvPr id="11" name="Text 9"/>
+          <p:cNvSpPr txBox="1"/>
+          <p:nvPr/>
+        </p:nvSpPr>
+        <p:spPr>
+          <a:xfrm>
+            <a:off x="4572000" y="1901952"/>
+            <a:ext cx="3017520" cy="292608"/>
+          </a:xfrm>
+          <a:prstGeom prst="rect">
+            <a:avLst/>
+          </a:prstGeom>
+          <a:noFill/>
+          <a:ln/>
+        </p:spPr>
+        <p:txBody>
+          <a:bodyPr wrap="square" lIns="0" tIns="0" rIns="0" bIns="0" rtlCol="0" anchor="ctr"/>
+          <a:lstStyle/>
+          <a:p>
+            <a:pPr indent="0" marL="0">
+              <a:buNone/>
+            </a:pPr>
+            <a:r>
+              <a:rPr lang="en-US" sz="1100" b="1" dirty="0">
+                <a:solidFill>
+                  <a:srgbClr val="667085"/>
+                </a:solidFill>
+                <a:latin typeface="IBM Plex Mono" pitchFamily="34" charset="0"/>
+                <a:ea typeface="IBM Plex Mono" pitchFamily="34" charset="-122"/>
+                <a:cs typeface="IBM Plex Mono" pitchFamily="34" charset="-120"/>
+              </a:rPr>
+              <a:t>WHAT I'M THINKING</a:t>
+            </a:r>
+            <a:endParaRPr lang="en-US" sz="1100" dirty="0"/>
+          </a:p>
+        </p:txBody>
+      </p:sp>
+      <p:sp>
+        <p:nvSpPr>
+          <p:cNvPr id="12" name="Text 10"/>
+          <p:cNvSpPr txBox="1"/>
+          <p:nvPr/>
+        </p:nvSpPr>
+        <p:spPr>
+          <a:xfrm>
+            <a:off x="4572000" y="2249424"/>
+            <a:ext cx="3017520" cy="1719072"/>
+          </a:xfrm>
+          <a:prstGeom prst="rect">
+            <a:avLst/>
+          </a:prstGeom>
+          <a:noFill/>
+          <a:ln/>
+        </p:spPr>
+        <p:txBody>
+          <a:bodyPr wrap="square" lIns="0" tIns="0" rIns="0" bIns="0" rtlCol="0" anchor="t"/>
+          <a:lstStyle/>
+          <a:p>
+            <a:pPr indent="0" marL="0">
+              <a:lnSpc>
+                <a:spcPct val="118000"/>
+              </a:lnSpc>
+              <a:buNone/>
+            </a:pPr>
+            <a:r>
+              <a:rPr lang="en-US" sz="1100" dirty="0">
+                <a:solidFill>
+                  <a:srgbClr val="101828"/>
+                </a:solidFill>
+                <a:latin typeface="IBM Plex Sans" pitchFamily="34" charset="0"/>
+                <a:ea typeface="IBM Plex Sans" pitchFamily="34" charset="-122"/>
+                <a:cs typeface="IBM Plex Sans" pitchFamily="34" charset="-120"/>
+              </a:rPr>
+              <a:t>Eight marks is reasoning, not a list.</a:t>
+            </a:r>
+            <a:endParaRPr lang="en-US" sz="1100" dirty="0"/>
+          </a:p>
+          <a:p>
+            <a:pPr indent="0" marL="0">
+              <a:lnSpc>
+                <a:spcPct val="118000"/>
+              </a:lnSpc>
+              <a:buNone/>
+            </a:pPr>
+            <a:endParaRPr lang="en-US" sz="1100" dirty="0"/>
+          </a:p>
+          <a:p>
+            <a:pPr indent="0" marL="0">
+              <a:lnSpc>
+                <a:spcPct val="118000"/>
+              </a:lnSpc>
+              <a:buNone/>
+            </a:pPr>
+            <a:r>
+              <a:rPr lang="en-US" sz="1100" dirty="0">
+                <a:solidFill>
+                  <a:srgbClr val="101828"/>
+                </a:solidFill>
+                <a:latin typeface="IBM Plex Sans" pitchFamily="34" charset="0"/>
+                <a:ea typeface="IBM Plex Sans" pitchFamily="34" charset="-122"/>
+                <a:cs typeface="IBM Plex Sans" pitchFamily="34" charset="-120"/>
+              </a:rPr>
+              <a:t>Two impacts I can say something real about beat all six named thinly.</a:t>
+            </a:r>
+            <a:endParaRPr lang="en-US" sz="1100" dirty="0"/>
+          </a:p>
+          <a:p>
+            <a:pPr indent="0" marL="0">
+              <a:lnSpc>
+                <a:spcPct val="118000"/>
+              </a:lnSpc>
+              <a:buNone/>
+            </a:pPr>
+            <a:endParaRPr lang="en-US" sz="1100" dirty="0"/>
+          </a:p>
+          <a:p>
+            <a:pPr indent="0" marL="0">
+              <a:lnSpc>
+                <a:spcPct val="118000"/>
+              </a:lnSpc>
+              <a:buNone/>
+            </a:pPr>
+            <a:r>
+              <a:rPr lang="en-US" sz="1100" dirty="0">
+                <a:solidFill>
+                  <a:srgbClr val="101828"/>
+                </a:solidFill>
+                <a:latin typeface="IBM Plex Sans" pitchFamily="34" charset="0"/>
+                <a:ea typeface="IBM Plex Sans" pitchFamily="34" charset="-122"/>
+                <a:cs typeface="IBM Plex Sans" pitchFamily="34" charset="-120"/>
+              </a:rPr>
+              <a:t>So: name who is affected, argue both ways, then commit.</a:t>
+            </a:r>
+            <a:endParaRPr lang="en-US" sz="1100" dirty="0"/>
+          </a:p>
+        </p:txBody>
+      </p:sp>
+      <p:sp>
+        <p:nvSpPr>
+          <p:cNvPr id="13" name="Shape 11"/>
+          <p:cNvSpPr/>
+          <p:nvPr/>
+        </p:nvSpPr>
+        <p:spPr>
+          <a:xfrm>
+            <a:off x="8092440" y="1737360"/>
+            <a:ext cx="3566160" cy="2377440"/>
+          </a:xfrm>
+          <a:prstGeom prst="roundRect">
+            <a:avLst>
+              <a:gd name="adj" fmla="val 4615"/>
+            </a:avLst>
+          </a:prstGeom>
+          <a:solidFill>
+            <a:srgbClr val="FFFFFF"/>
+          </a:solidFill>
+          <a:ln w="15875">
+            <a:solidFill>
+              <a:srgbClr val="D9DEE7"/>
+            </a:solidFill>
+            <a:prstDash val="solid"/>
+          </a:ln>
+        </p:spPr>
+      </p:sp>
+      <p:sp>
+        <p:nvSpPr>
+          <p:cNvPr id="14" name="Text 12"/>
+          <p:cNvSpPr txBox="1"/>
+          <p:nvPr/>
+        </p:nvSpPr>
+        <p:spPr>
+          <a:xfrm>
+            <a:off x="8366760" y="1901952"/>
+            <a:ext cx="3017520" cy="292608"/>
+          </a:xfrm>
+          <a:prstGeom prst="rect">
+            <a:avLst/>
+          </a:prstGeom>
+          <a:noFill/>
+          <a:ln/>
+        </p:spPr>
+        <p:txBody>
+          <a:bodyPr wrap="square" lIns="0" tIns="0" rIns="0" bIns="0" rtlCol="0" anchor="ctr"/>
+          <a:lstStyle/>
+          <a:p>
+            <a:pPr indent="0" marL="0">
+              <a:buNone/>
+            </a:pPr>
+            <a:r>
+              <a:rPr lang="en-US" sz="1100" b="1" dirty="0">
+                <a:solidFill>
+                  <a:srgbClr val="667085"/>
+                </a:solidFill>
+                <a:latin typeface="IBM Plex Mono" pitchFamily="34" charset="0"/>
+                <a:ea typeface="IBM Plex Mono" pitchFamily="34" charset="-122"/>
+                <a:cs typeface="IBM Plex Mono" pitchFamily="34" charset="-120"/>
+              </a:rPr>
+              <a:t>HOW I BUILD IT</a:t>
+            </a:r>
+            <a:endParaRPr lang="en-US" sz="1100" dirty="0"/>
+          </a:p>
+        </p:txBody>
+      </p:sp>
+      <p:sp>
+        <p:nvSpPr>
+          <p:cNvPr id="15" name="Text 13"/>
+          <p:cNvSpPr txBox="1"/>
+          <p:nvPr/>
+        </p:nvSpPr>
+        <p:spPr>
+          <a:xfrm>
+            <a:off x="8366760" y="2249424"/>
+            <a:ext cx="3017520" cy="1719072"/>
+          </a:xfrm>
+          <a:prstGeom prst="rect">
+            <a:avLst/>
+          </a:prstGeom>
+          <a:noFill/>
+          <a:ln/>
+        </p:spPr>
+        <p:txBody>
+          <a:bodyPr wrap="square" lIns="0" tIns="0" rIns="0" bIns="0" rtlCol="0" anchor="t"/>
+          <a:lstStyle/>
+          <a:p>
+            <a:pPr indent="0" marL="0">
+              <a:lnSpc>
+                <a:spcPct val="118000"/>
+              </a:lnSpc>
+              <a:buNone/>
+            </a:pPr>
+            <a:r>
+              <a:rPr lang="en-US" sz="1100" dirty="0">
+                <a:solidFill>
+                  <a:srgbClr val="101828"/>
+                </a:solidFill>
+                <a:latin typeface="IBM Plex Sans" pitchFamily="34" charset="0"/>
+                <a:ea typeface="IBM Plex Sans" pitchFamily="34" charset="-122"/>
+                <a:cs typeface="IBM Plex Sans" pitchFamily="34" charset="-120"/>
+              </a:rPr>
+              <a:t>ETHICAL - some cannot use an app.</a:t>
+            </a:r>
+            <a:endParaRPr lang="en-US" sz="1100" dirty="0"/>
+          </a:p>
+          <a:p>
+            <a:pPr indent="0" marL="0">
+              <a:lnSpc>
+                <a:spcPct val="118000"/>
+              </a:lnSpc>
+              <a:buNone/>
+            </a:pPr>
+            <a:r>
+              <a:rPr lang="en-US" sz="1100" dirty="0">
+                <a:solidFill>
+                  <a:srgbClr val="101828"/>
+                </a:solidFill>
+                <a:latin typeface="IBM Plex Sans" pitchFamily="34" charset="0"/>
+                <a:ea typeface="IBM Plex Sans" pitchFamily="34" charset="-122"/>
+                <a:cs typeface="IBM Plex Sans" pitchFamily="34" charset="-120"/>
+              </a:rPr>
+              <a:t>Affected: older customers, anyone with no smartphone.</a:t>
+            </a:r>
+            <a:endParaRPr lang="en-US" sz="1100" dirty="0"/>
+          </a:p>
+          <a:p>
+            <a:pPr indent="0" marL="0">
+              <a:lnSpc>
+                <a:spcPct val="118000"/>
+              </a:lnSpc>
+              <a:buNone/>
+            </a:pPr>
+            <a:endParaRPr lang="en-US" sz="1100" dirty="0"/>
+          </a:p>
+          <a:p>
+            <a:pPr indent="0" marL="0">
+              <a:lnSpc>
+                <a:spcPct val="118000"/>
+              </a:lnSpc>
+              <a:buNone/>
+            </a:pPr>
+            <a:r>
+              <a:rPr lang="en-US" sz="1100" dirty="0">
+                <a:solidFill>
+                  <a:srgbClr val="101828"/>
+                </a:solidFill>
+                <a:latin typeface="IBM Plex Sans" pitchFamily="34" charset="0"/>
+                <a:ea typeface="IBM Plex Sans" pitchFamily="34" charset="-122"/>
+                <a:cs typeface="IBM Plex Sans" pitchFamily="34" charset="-120"/>
+              </a:rPr>
+              <a:t>For: cheaper, open all hours.</a:t>
+            </a:r>
+            <a:endParaRPr lang="en-US" sz="1100" dirty="0"/>
+          </a:p>
+          <a:p>
+            <a:pPr indent="0" marL="0">
+              <a:lnSpc>
+                <a:spcPct val="118000"/>
+              </a:lnSpc>
+              <a:buNone/>
+            </a:pPr>
+            <a:r>
+              <a:rPr lang="en-US" sz="1100" dirty="0">
+                <a:solidFill>
+                  <a:srgbClr val="101828"/>
+                </a:solidFill>
+                <a:latin typeface="IBM Plex Sans" pitchFamily="34" charset="0"/>
+                <a:ea typeface="IBM Plex Sans" pitchFamily="34" charset="-122"/>
+                <a:cs typeface="IBM Plex Sans" pitchFamily="34" charset="-120"/>
+              </a:rPr>
+              <a:t>Against: those needing it most can replace it least.</a:t>
+            </a:r>
+            <a:endParaRPr lang="en-US" sz="1100" dirty="0"/>
+          </a:p>
+          <a:p>
+            <a:pPr indent="0" marL="0">
+              <a:lnSpc>
+                <a:spcPct val="118000"/>
+              </a:lnSpc>
+              <a:buNone/>
+            </a:pPr>
+            <a:endParaRPr lang="en-US" sz="1100" dirty="0"/>
+          </a:p>
+          <a:p>
+            <a:pPr indent="0" marL="0">
+              <a:lnSpc>
+                <a:spcPct val="118000"/>
+              </a:lnSpc>
+              <a:buNone/>
+            </a:pPr>
+            <a:r>
+              <a:rPr lang="en-US" sz="1100" dirty="0">
+                <a:solidFill>
+                  <a:srgbClr val="101828"/>
+                </a:solidFill>
+                <a:latin typeface="IBM Plex Sans" pitchFamily="34" charset="0"/>
+                <a:ea typeface="IBM Plex Sans" pitchFamily="34" charset="-122"/>
+                <a:cs typeface="IBM Plex Sans" pitchFamily="34" charset="-120"/>
+              </a:rPr>
+              <a:t>CULTURAL - a town centre with no bank.</a:t>
+            </a:r>
+            <a:endParaRPr lang="en-US" sz="1100" dirty="0"/>
+          </a:p>
+        </p:txBody>
+      </p:sp>
+      <p:sp>
+        <p:nvSpPr>
+          <p:cNvPr id="16" name="Shape 14"/>
+          <p:cNvSpPr/>
+          <p:nvPr/>
+        </p:nvSpPr>
+        <p:spPr>
+          <a:xfrm>
+            <a:off x="502920" y="4251960"/>
+            <a:ext cx="11155680" cy="2057400"/>
+          </a:xfrm>
+          <a:prstGeom prst="roundRect">
+            <a:avLst>
+              <a:gd name="adj" fmla="val 5333"/>
+            </a:avLst>
+          </a:prstGeom>
+          <a:solidFill>
+            <a:srgbClr val="FFFFFF"/>
+          </a:solidFill>
+          <a:ln w="15875">
+            <a:solidFill>
+              <a:srgbClr val="08A6A6"/>
+            </a:solidFill>
+            <a:prstDash val="solid"/>
+          </a:ln>
+        </p:spPr>
+      </p:sp>
+      <p:sp>
+        <p:nvSpPr>
+          <p:cNvPr id="17" name="Text 15"/>
+          <p:cNvSpPr txBox="1"/>
+          <p:nvPr/>
+        </p:nvSpPr>
+        <p:spPr>
+          <a:xfrm>
+            <a:off x="868680" y="4416552"/>
+            <a:ext cx="10424160" cy="292608"/>
+          </a:xfrm>
+          <a:prstGeom prst="rect">
+            <a:avLst/>
+          </a:prstGeom>
+          <a:noFill/>
+          <a:ln/>
+        </p:spPr>
+        <p:txBody>
+          <a:bodyPr wrap="square" lIns="0" tIns="0" rIns="0" bIns="0" rtlCol="0" anchor="ctr"/>
+          <a:lstStyle/>
+          <a:p>
+            <a:pPr indent="0" marL="0">
+              <a:buNone/>
+            </a:pPr>
+            <a:r>
+              <a:rPr lang="en-US" sz="1100" b="1" dirty="0">
+                <a:solidFill>
+                  <a:srgbClr val="08A6A6"/>
+                </a:solidFill>
+                <a:latin typeface="IBM Plex Mono" pitchFamily="34" charset="0"/>
+                <a:ea typeface="IBM Plex Mono" pitchFamily="34" charset="-122"/>
+                <a:cs typeface="IBM Plex Mono" pitchFamily="34" charset="-120"/>
+              </a:rPr>
+              <a:t>THE FINISHED ANSWER</a:t>
+            </a:r>
+            <a:endParaRPr lang="en-US" sz="1100" dirty="0"/>
+          </a:p>
+        </p:txBody>
+      </p:sp>
+      <p:sp>
+        <p:nvSpPr>
+          <p:cNvPr id="18" name="Text 16"/>
+          <p:cNvSpPr txBox="1"/>
+          <p:nvPr/>
+        </p:nvSpPr>
+        <p:spPr>
+          <a:xfrm>
+            <a:off x="868680" y="4764024"/>
+            <a:ext cx="10424160" cy="1463040"/>
+          </a:xfrm>
+          <a:prstGeom prst="rect">
+            <a:avLst/>
+          </a:prstGeom>
+          <a:noFill/>
+          <a:ln/>
+        </p:spPr>
+        <p:txBody>
+          <a:bodyPr wrap="square" lIns="0" tIns="0" rIns="0" bIns="0" rtlCol="0" anchor="t"/>
+          <a:lstStyle/>
+          <a:p>
+            <a:pPr indent="0" marL="0">
+              <a:lnSpc>
+                <a:spcPct val="120000"/>
+              </a:lnSpc>
+              <a:buNone/>
+            </a:pPr>
+            <a:r>
+              <a:rPr lang="en-US" sz="1500" dirty="0">
+                <a:solidFill>
+                  <a:srgbClr val="101828"/>
+                </a:solidFill>
+                <a:latin typeface="IBM Plex Sans" pitchFamily="34" charset="0"/>
+                <a:ea typeface="IBM Plex Sans" pitchFamily="34" charset="-122"/>
+                <a:cs typeface="IBM Plex Sans" pitchFamily="34" charset="-120"/>
+              </a:rPr>
+              <a:t>"Closing the branch raises an ethical issue, because some customers cannot use the app at all. Older customers and those without a smartphone lose the only way they can bank, while the bank and most of its customers gain a cheaper service open at any hour. There is a cultural impact too: the town centre loses another reason to visit it. On balance the closure is hard to justify until the bank has provided for the customers it leaves behind, because those worst affected have fewest alternatives."</a:t>
+            </a:r>
+            <a:endParaRPr lang="en-US" sz="1500" dirty="0"/>
           </a:p>
         </p:txBody>
       </p:sp>
@@ -3281,14 +3955,75 @@
       </p:sp>
       <p:sp>
         <p:nvSpPr>
-          <p:cNvPr id="5" name="Text 3"/>
-          <p:cNvSpPr txBox="1"/>
-          <p:nvPr/>
-        </p:nvSpPr>
-        <p:spPr>
-          <a:xfrm>
-            <a:off x="502920" y="411480"/>
-            <a:ext cx="11155680" cy="777240"/>
+          <p:cNvPr id="5" name="Shape 3"/>
+          <p:cNvSpPr/>
+          <p:nvPr/>
+        </p:nvSpPr>
+        <p:spPr>
+          <a:xfrm>
+            <a:off x="502920" y="457200"/>
+            <a:ext cx="1051560" cy="420624"/>
+          </a:xfrm>
+          <a:prstGeom prst="roundRect">
+            <a:avLst>
+              <a:gd name="adj" fmla="val 21739"/>
+            </a:avLst>
+          </a:prstGeom>
+          <a:solidFill>
+            <a:srgbClr val="F4B942"/>
+          </a:solidFill>
+          <a:ln/>
+        </p:spPr>
+      </p:sp>
+      <p:sp>
+        <p:nvSpPr>
+          <p:cNvPr id="6" name="Text 4"/>
+          <p:cNvSpPr txBox="1"/>
+          <p:nvPr/>
+        </p:nvSpPr>
+        <p:spPr>
+          <a:xfrm>
+            <a:off x="502920" y="457200"/>
+            <a:ext cx="1051560" cy="420624"/>
+          </a:xfrm>
+          <a:prstGeom prst="rect">
+            <a:avLst/>
+          </a:prstGeom>
+          <a:noFill/>
+          <a:ln/>
+        </p:spPr>
+        <p:txBody>
+          <a:bodyPr wrap="square" lIns="0" tIns="0" rIns="0" bIns="0" rtlCol="0" anchor="ctr"/>
+          <a:lstStyle/>
+          <a:p>
+            <a:pPr algn="ctr" indent="0" marL="0">
+              <a:buNone/>
+            </a:pPr>
+            <a:r>
+              <a:rPr lang="en-US" sz="1200" b="1" dirty="0">
+                <a:solidFill>
+                  <a:srgbClr val="101828"/>
+                </a:solidFill>
+                <a:latin typeface="IBM Plex Mono" pitchFamily="34" charset="0"/>
+                <a:ea typeface="IBM Plex Mono" pitchFamily="34" charset="-122"/>
+                <a:cs typeface="IBM Plex Mono" pitchFamily="34" charset="-120"/>
+              </a:rPr>
+              <a:t>CHECK</a:t>
+            </a:r>
+            <a:endParaRPr lang="en-US" sz="1200" dirty="0"/>
+          </a:p>
+        </p:txBody>
+      </p:sp>
+      <p:sp>
+        <p:nvSpPr>
+          <p:cNvPr id="7" name="Text 5"/>
+          <p:cNvSpPr txBox="1"/>
+          <p:nvPr/>
+        </p:nvSpPr>
+        <p:spPr>
+          <a:xfrm>
+            <a:off x="1737360" y="457200"/>
+            <a:ext cx="9875520" cy="420624"/>
           </a:xfrm>
           <a:prstGeom prst="rect">
             <a:avLst/>
@@ -3304,30 +4039,30 @@
               <a:buNone/>
             </a:pPr>
             <a:r>
-              <a:rPr lang="en-US" sz="3200" b="1" dirty="0">
-                <a:solidFill>
-                  <a:srgbClr val="101828"/>
+              <a:rPr lang="en-US" sz="1500" dirty="0">
+                <a:solidFill>
+                  <a:srgbClr val="667085"/>
                 </a:solidFill>
                 <a:latin typeface="IBM Plex Sans" pitchFamily="34" charset="0"/>
                 <a:ea typeface="IBM Plex Sans" pitchFamily="34" charset="-122"/>
                 <a:cs typeface="IBM Plex Sans" pitchFamily="34" charset="-120"/>
               </a:rPr>
-              <a:t>Worth knowing</a:t>
-            </a:r>
-            <a:endParaRPr lang="en-US" sz="3200" dirty="0"/>
-          </a:p>
-        </p:txBody>
-      </p:sp>
-      <p:sp>
-        <p:nvSpPr>
-          <p:cNvPr id="6" name="Text 4"/>
-          <p:cNvSpPr txBox="1"/>
-          <p:nvPr/>
-        </p:nvSpPr>
-        <p:spPr>
-          <a:xfrm>
-            <a:off x="502920" y="1170432"/>
-            <a:ext cx="11155680" cy="411480"/>
+              <a:t>Hands down. Everyone commits.</a:t>
+            </a:r>
+            <a:endParaRPr lang="en-US" sz="1500" dirty="0"/>
+          </a:p>
+        </p:txBody>
+      </p:sp>
+      <p:sp>
+        <p:nvSpPr>
+          <p:cNvPr id="8" name="Text 6"/>
+          <p:cNvSpPr txBox="1"/>
+          <p:nvPr/>
+        </p:nvSpPr>
+        <p:spPr>
+          <a:xfrm>
+            <a:off x="502920" y="1097280"/>
+            <a:ext cx="11155680" cy="1005840"/>
           </a:xfrm>
           <a:prstGeom prst="rect">
             <a:avLst/>
@@ -3340,37 +4075,40 @@
           <a:lstStyle/>
           <a:p>
             <a:pPr indent="0" marL="0">
-              <a:buNone/>
-            </a:pPr>
-            <a:r>
-              <a:rPr lang="en-US" sz="1500" dirty="0">
-                <a:solidFill>
-                  <a:srgbClr val="667085"/>
+              <a:lnSpc>
+                <a:spcPct val="115000"/>
+              </a:lnSpc>
+              <a:buNone/>
+            </a:pPr>
+            <a:r>
+              <a:rPr lang="en-US" sz="2600" b="1" dirty="0">
+                <a:solidFill>
+                  <a:srgbClr val="101828"/>
                 </a:solidFill>
                 <a:latin typeface="IBM Plex Sans" pitchFamily="34" charset="0"/>
                 <a:ea typeface="IBM Plex Sans" pitchFamily="34" charset="-122"/>
                 <a:cs typeface="IBM Plex Sans" pitchFamily="34" charset="-120"/>
               </a:rPr>
-              <a:t>The information markers dotted around the room</a:t>
-            </a:r>
-            <a:endParaRPr lang="en-US" sz="1500" dirty="0"/>
-          </a:p>
-        </p:txBody>
-      </p:sp>
-      <p:sp>
-        <p:nvSpPr>
-          <p:cNvPr id="7" name="Shape 5"/>
+              <a:t>Why do these questions carry high marks in the exam?</a:t>
+            </a:r>
+            <a:endParaRPr lang="en-US" sz="2600" dirty="0"/>
+          </a:p>
+        </p:txBody>
+      </p:sp>
+      <p:sp>
+        <p:nvSpPr>
+          <p:cNvPr id="9" name="Shape 7"/>
           <p:cNvSpPr/>
           <p:nvPr/>
         </p:nvSpPr>
         <p:spPr>
           <a:xfrm>
-            <a:off x="502920" y="1828800"/>
-            <a:ext cx="5394960" cy="1737360"/>
+            <a:off x="502920" y="2331720"/>
+            <a:ext cx="11155680" cy="731520"/>
           </a:xfrm>
           <a:prstGeom prst="roundRect">
             <a:avLst>
-              <a:gd name="adj" fmla="val 6316"/>
+              <a:gd name="adj" fmla="val 15000"/>
             </a:avLst>
           </a:prstGeom>
           <a:solidFill>
@@ -3378,7 +4116,7 @@
           </a:solidFill>
           <a:ln w="15875">
             <a:solidFill>
-              <a:srgbClr val="2D63FF"/>
+              <a:srgbClr val="D9DEE7"/>
             </a:solidFill>
             <a:prstDash val="solid"/>
           </a:ln>
@@ -3386,14 +4124,75 @@
       </p:sp>
       <p:sp>
         <p:nvSpPr>
-          <p:cNvPr id="8" name="Text 6"/>
-          <p:cNvSpPr txBox="1"/>
-          <p:nvPr/>
-        </p:nvSpPr>
-        <p:spPr>
-          <a:xfrm>
-            <a:off x="822960" y="2011680"/>
-            <a:ext cx="4754880" cy="365760"/>
+          <p:cNvPr id="10" name="Shape 8"/>
+          <p:cNvSpPr/>
+          <p:nvPr/>
+        </p:nvSpPr>
+        <p:spPr>
+          <a:xfrm>
+            <a:off x="777240" y="2478024"/>
+            <a:ext cx="438912" cy="438912"/>
+          </a:xfrm>
+          <a:prstGeom prst="roundRect">
+            <a:avLst>
+              <a:gd name="adj" fmla="val 20833"/>
+            </a:avLst>
+          </a:prstGeom>
+          <a:solidFill>
+            <a:srgbClr val="EEF2FB"/>
+          </a:solidFill>
+          <a:ln/>
+        </p:spPr>
+      </p:sp>
+      <p:sp>
+        <p:nvSpPr>
+          <p:cNvPr id="11" name="Text 9"/>
+          <p:cNvSpPr txBox="1"/>
+          <p:nvPr/>
+        </p:nvSpPr>
+        <p:spPr>
+          <a:xfrm>
+            <a:off x="777240" y="2478024"/>
+            <a:ext cx="438912" cy="438912"/>
+          </a:xfrm>
+          <a:prstGeom prst="rect">
+            <a:avLst/>
+          </a:prstGeom>
+          <a:noFill/>
+          <a:ln/>
+        </p:spPr>
+        <p:txBody>
+          <a:bodyPr wrap="square" lIns="0" tIns="0" rIns="0" bIns="0" rtlCol="0" anchor="ctr"/>
+          <a:lstStyle/>
+          <a:p>
+            <a:pPr algn="ctr" indent="0" marL="0">
+              <a:buNone/>
+            </a:pPr>
+            <a:r>
+              <a:rPr lang="en-US" sz="1300" b="1" dirty="0">
+                <a:solidFill>
+                  <a:srgbClr val="2D63FF"/>
+                </a:solidFill>
+                <a:latin typeface="IBM Plex Mono" pitchFamily="34" charset="0"/>
+                <a:ea typeface="IBM Plex Mono" pitchFamily="34" charset="-122"/>
+                <a:cs typeface="IBM Plex Mono" pitchFamily="34" charset="-120"/>
+              </a:rPr>
+              <a:t>A</a:t>
+            </a:r>
+            <a:endParaRPr lang="en-US" sz="1300" dirty="0"/>
+          </a:p>
+        </p:txBody>
+      </p:sp>
+      <p:sp>
+        <p:nvSpPr>
+          <p:cNvPr id="12" name="Text 10"/>
+          <p:cNvSpPr txBox="1"/>
+          <p:nvPr/>
+        </p:nvSpPr>
+        <p:spPr>
+          <a:xfrm>
+            <a:off x="1417320" y="2331720"/>
+            <a:ext cx="10058400" cy="731520"/>
           </a:xfrm>
           <a:prstGeom prst="rect">
             <a:avLst/>
@@ -3406,79 +4205,40 @@
           <a:lstStyle/>
           <a:p>
             <a:pPr indent="0" marL="0">
-              <a:buNone/>
-            </a:pPr>
-            <a:r>
-              <a:rPr lang="en-US" sz="1600" b="1" dirty="0">
-                <a:solidFill>
-                  <a:srgbClr val="2D63FF"/>
+              <a:lnSpc>
+                <a:spcPct val="115000"/>
+              </a:lnSpc>
+              <a:buNone/>
+            </a:pPr>
+            <a:r>
+              <a:rPr lang="en-US" sz="1700" dirty="0">
+                <a:solidFill>
+                  <a:srgbClr val="101828"/>
                 </a:solidFill>
                 <a:latin typeface="IBM Plex Sans" pitchFamily="34" charset="0"/>
                 <a:ea typeface="IBM Plex Sans" pitchFamily="34" charset="-122"/>
                 <a:cs typeface="IBM Plex Sans" pitchFamily="34" charset="-120"/>
               </a:rPr>
-              <a:t>Why this topic exists</a:t>
-            </a:r>
-            <a:endParaRPr lang="en-US" sz="1600" dirty="0"/>
-          </a:p>
-        </p:txBody>
-      </p:sp>
-      <p:sp>
-        <p:nvSpPr>
-          <p:cNvPr id="9" name="Text 7"/>
-          <p:cNvSpPr txBox="1"/>
-          <p:nvPr/>
-        </p:nvSpPr>
-        <p:spPr>
-          <a:xfrm>
-            <a:off x="822960" y="2395728"/>
-            <a:ext cx="4754880" cy="1005840"/>
-          </a:xfrm>
-          <a:prstGeom prst="rect">
-            <a:avLst/>
-          </a:prstGeom>
-          <a:noFill/>
-          <a:ln/>
-        </p:spPr>
-        <p:txBody>
-          <a:bodyPr wrap="square" lIns="0" tIns="0" rIns="0" bIns="0" rtlCol="0" anchor="t"/>
-          <a:lstStyle/>
-          <a:p>
-            <a:pPr indent="0" marL="0">
-              <a:lnSpc>
-                <a:spcPct val="120000"/>
-              </a:lnSpc>
-              <a:buNone/>
-            </a:pPr>
-            <a:r>
-              <a:rPr lang="en-US" sz="1300" dirty="0">
-                <a:solidFill>
-                  <a:srgbClr val="667085"/>
-                </a:solidFill>
-                <a:latin typeface="IBM Plex Sans" pitchFamily="34" charset="0"/>
-                <a:ea typeface="IBM Plex Sans" pitchFamily="34" charset="-122"/>
-                <a:cs typeface="IBM Plex Sans" pitchFamily="34" charset="-120"/>
-              </a:rPr>
-              <a:t>Every specification now includes impacts, because the people building systems are the ones who decide what gets built. The technical skill is only half the job.</a:t>
-            </a:r>
-            <a:endParaRPr lang="en-US" sz="1300" dirty="0"/>
-          </a:p>
-        </p:txBody>
-      </p:sp>
-      <p:sp>
-        <p:nvSpPr>
-          <p:cNvPr id="10" name="Shape 8"/>
+              <a:t>They need long answers</a:t>
+            </a:r>
+            <a:endParaRPr lang="en-US" sz="1700" dirty="0"/>
+          </a:p>
+        </p:txBody>
+      </p:sp>
+      <p:sp>
+        <p:nvSpPr>
+          <p:cNvPr id="13" name="Shape 11"/>
           <p:cNvSpPr/>
           <p:nvPr/>
         </p:nvSpPr>
         <p:spPr>
           <a:xfrm>
-            <a:off x="6217920" y="1828800"/>
-            <a:ext cx="5394960" cy="1737360"/>
+            <a:off x="502920" y="3200400"/>
+            <a:ext cx="11155680" cy="731520"/>
           </a:xfrm>
           <a:prstGeom prst="roundRect">
             <a:avLst>
-              <a:gd name="adj" fmla="val 6316"/>
+              <a:gd name="adj" fmla="val 15000"/>
             </a:avLst>
           </a:prstGeom>
           <a:solidFill>
@@ -3486,7 +4246,7 @@
           </a:solidFill>
           <a:ln w="15875">
             <a:solidFill>
-              <a:srgbClr val="08A6A6"/>
+              <a:srgbClr val="D9DEE7"/>
             </a:solidFill>
             <a:prstDash val="solid"/>
           </a:ln>
@@ -3494,14 +4254,75 @@
       </p:sp>
       <p:sp>
         <p:nvSpPr>
-          <p:cNvPr id="11" name="Text 9"/>
-          <p:cNvSpPr txBox="1"/>
-          <p:nvPr/>
-        </p:nvSpPr>
-        <p:spPr>
-          <a:xfrm>
-            <a:off x="6537960" y="2011680"/>
-            <a:ext cx="4754880" cy="365760"/>
+          <p:cNvPr id="14" name="Shape 12"/>
+          <p:cNvSpPr/>
+          <p:nvPr/>
+        </p:nvSpPr>
+        <p:spPr>
+          <a:xfrm>
+            <a:off x="777240" y="3346704"/>
+            <a:ext cx="438912" cy="438912"/>
+          </a:xfrm>
+          <a:prstGeom prst="roundRect">
+            <a:avLst>
+              <a:gd name="adj" fmla="val 20833"/>
+            </a:avLst>
+          </a:prstGeom>
+          <a:solidFill>
+            <a:srgbClr val="EEF2FB"/>
+          </a:solidFill>
+          <a:ln/>
+        </p:spPr>
+      </p:sp>
+      <p:sp>
+        <p:nvSpPr>
+          <p:cNvPr id="15" name="Text 13"/>
+          <p:cNvSpPr txBox="1"/>
+          <p:nvPr/>
+        </p:nvSpPr>
+        <p:spPr>
+          <a:xfrm>
+            <a:off x="777240" y="3346704"/>
+            <a:ext cx="438912" cy="438912"/>
+          </a:xfrm>
+          <a:prstGeom prst="rect">
+            <a:avLst/>
+          </a:prstGeom>
+          <a:noFill/>
+          <a:ln/>
+        </p:spPr>
+        <p:txBody>
+          <a:bodyPr wrap="square" lIns="0" tIns="0" rIns="0" bIns="0" rtlCol="0" anchor="ctr"/>
+          <a:lstStyle/>
+          <a:p>
+            <a:pPr algn="ctr" indent="0" marL="0">
+              <a:buNone/>
+            </a:pPr>
+            <a:r>
+              <a:rPr lang="en-US" sz="1300" b="1" dirty="0">
+                <a:solidFill>
+                  <a:srgbClr val="2D63FF"/>
+                </a:solidFill>
+                <a:latin typeface="IBM Plex Mono" pitchFamily="34" charset="0"/>
+                <a:ea typeface="IBM Plex Mono" pitchFamily="34" charset="-122"/>
+                <a:cs typeface="IBM Plex Mono" pitchFamily="34" charset="-120"/>
+              </a:rPr>
+              <a:t>B</a:t>
+            </a:r>
+            <a:endParaRPr lang="en-US" sz="1300" dirty="0"/>
+          </a:p>
+        </p:txBody>
+      </p:sp>
+      <p:sp>
+        <p:nvSpPr>
+          <p:cNvPr id="16" name="Text 14"/>
+          <p:cNvSpPr txBox="1"/>
+          <p:nvPr/>
+        </p:nvSpPr>
+        <p:spPr>
+          <a:xfrm>
+            <a:off x="1417320" y="3200400"/>
+            <a:ext cx="10058400" cy="731520"/>
           </a:xfrm>
           <a:prstGeom prst="rect">
             <a:avLst/>
@@ -3514,79 +4335,40 @@
           <a:lstStyle/>
           <a:p>
             <a:pPr indent="0" marL="0">
-              <a:buNone/>
-            </a:pPr>
-            <a:r>
-              <a:rPr lang="en-US" sz="1600" b="1" dirty="0">
-                <a:solidFill>
-                  <a:srgbClr val="08A6A6"/>
+              <a:lnSpc>
+                <a:spcPct val="115000"/>
+              </a:lnSpc>
+              <a:buNone/>
+            </a:pPr>
+            <a:r>
+              <a:rPr lang="en-US" sz="1700" dirty="0">
+                <a:solidFill>
+                  <a:srgbClr val="101828"/>
                 </a:solidFill>
                 <a:latin typeface="IBM Plex Sans" pitchFamily="34" charset="0"/>
                 <a:ea typeface="IBM Plex Sans" pitchFamily="34" charset="-122"/>
                 <a:cs typeface="IBM Plex Sans" pitchFamily="34" charset="-120"/>
               </a:rPr>
-              <a:t>Trolley problems</a:t>
-            </a:r>
-            <a:endParaRPr lang="en-US" sz="1600" dirty="0"/>
-          </a:p>
-        </p:txBody>
-      </p:sp>
-      <p:sp>
-        <p:nvSpPr>
-          <p:cNvPr id="12" name="Text 10"/>
-          <p:cNvSpPr txBox="1"/>
-          <p:nvPr/>
-        </p:nvSpPr>
-        <p:spPr>
-          <a:xfrm>
-            <a:off x="6537960" y="2395728"/>
-            <a:ext cx="4754880" cy="1005840"/>
-          </a:xfrm>
-          <a:prstGeom prst="rect">
-            <a:avLst/>
-          </a:prstGeom>
-          <a:noFill/>
-          <a:ln/>
-        </p:spPr>
-        <p:txBody>
-          <a:bodyPr wrap="square" lIns="0" tIns="0" rIns="0" bIns="0" rtlCol="0" anchor="t"/>
-          <a:lstStyle/>
-          <a:p>
-            <a:pPr indent="0" marL="0">
-              <a:lnSpc>
-                <a:spcPct val="120000"/>
-              </a:lnSpc>
-              <a:buNone/>
-            </a:pPr>
-            <a:r>
-              <a:rPr lang="en-US" sz="1300" dirty="0">
-                <a:solidFill>
-                  <a:srgbClr val="667085"/>
-                </a:solidFill>
-                <a:latin typeface="IBM Plex Sans" pitchFamily="34" charset="0"/>
-                <a:ea typeface="IBM Plex Sans" pitchFamily="34" charset="-122"/>
-                <a:cs typeface="IBM Plex Sans" pitchFamily="34" charset="-120"/>
-              </a:rPr>
-              <a:t>Driverless cars force a decision nobody wants to write down: who a car should protect in a crash. Engineers really do have to choose.</a:t>
-            </a:r>
-            <a:endParaRPr lang="en-US" sz="1300" dirty="0"/>
-          </a:p>
-        </p:txBody>
-      </p:sp>
-      <p:sp>
-        <p:nvSpPr>
-          <p:cNvPr id="13" name="Shape 11"/>
+              <a:t>They have one correct answer</a:t>
+            </a:r>
+            <a:endParaRPr lang="en-US" sz="1700" dirty="0"/>
+          </a:p>
+        </p:txBody>
+      </p:sp>
+      <p:sp>
+        <p:nvSpPr>
+          <p:cNvPr id="17" name="Shape 15"/>
           <p:cNvSpPr/>
           <p:nvPr/>
         </p:nvSpPr>
         <p:spPr>
           <a:xfrm>
-            <a:off x="502920" y="3794760"/>
-            <a:ext cx="5394960" cy="1737360"/>
+            <a:off x="502920" y="4069080"/>
+            <a:ext cx="11155680" cy="731520"/>
           </a:xfrm>
           <a:prstGeom prst="roundRect">
             <a:avLst>
-              <a:gd name="adj" fmla="val 6316"/>
+              <a:gd name="adj" fmla="val 15000"/>
             </a:avLst>
           </a:prstGeom>
           <a:solidFill>
@@ -3594,7 +4376,7 @@
           </a:solidFill>
           <a:ln w="15875">
             <a:solidFill>
-              <a:srgbClr val="2D63FF"/>
+              <a:srgbClr val="D9DEE7"/>
             </a:solidFill>
             <a:prstDash val="solid"/>
           </a:ln>
@@ -3602,14 +4384,75 @@
       </p:sp>
       <p:sp>
         <p:nvSpPr>
-          <p:cNvPr id="14" name="Text 12"/>
-          <p:cNvSpPr txBox="1"/>
-          <p:nvPr/>
-        </p:nvSpPr>
-        <p:spPr>
-          <a:xfrm>
-            <a:off x="822960" y="3977640"/>
-            <a:ext cx="4754880" cy="365760"/>
+          <p:cNvPr id="18" name="Shape 16"/>
+          <p:cNvSpPr/>
+          <p:nvPr/>
+        </p:nvSpPr>
+        <p:spPr>
+          <a:xfrm>
+            <a:off x="777240" y="4215384"/>
+            <a:ext cx="438912" cy="438912"/>
+          </a:xfrm>
+          <a:prstGeom prst="roundRect">
+            <a:avLst>
+              <a:gd name="adj" fmla="val 20833"/>
+            </a:avLst>
+          </a:prstGeom>
+          <a:solidFill>
+            <a:srgbClr val="EEF2FB"/>
+          </a:solidFill>
+          <a:ln/>
+        </p:spPr>
+      </p:sp>
+      <p:sp>
+        <p:nvSpPr>
+          <p:cNvPr id="19" name="Text 17"/>
+          <p:cNvSpPr txBox="1"/>
+          <p:nvPr/>
+        </p:nvSpPr>
+        <p:spPr>
+          <a:xfrm>
+            <a:off x="777240" y="4215384"/>
+            <a:ext cx="438912" cy="438912"/>
+          </a:xfrm>
+          <a:prstGeom prst="rect">
+            <a:avLst/>
+          </a:prstGeom>
+          <a:noFill/>
+          <a:ln/>
+        </p:spPr>
+        <p:txBody>
+          <a:bodyPr wrap="square" lIns="0" tIns="0" rIns="0" bIns="0" rtlCol="0" anchor="ctr"/>
+          <a:lstStyle/>
+          <a:p>
+            <a:pPr algn="ctr" indent="0" marL="0">
+              <a:buNone/>
+            </a:pPr>
+            <a:r>
+              <a:rPr lang="en-US" sz="1300" b="1" dirty="0">
+                <a:solidFill>
+                  <a:srgbClr val="2D63FF"/>
+                </a:solidFill>
+                <a:latin typeface="IBM Plex Mono" pitchFamily="34" charset="0"/>
+                <a:ea typeface="IBM Plex Mono" pitchFamily="34" charset="-122"/>
+                <a:cs typeface="IBM Plex Mono" pitchFamily="34" charset="-120"/>
+              </a:rPr>
+              <a:t>C</a:t>
+            </a:r>
+            <a:endParaRPr lang="en-US" sz="1300" dirty="0"/>
+          </a:p>
+        </p:txBody>
+      </p:sp>
+      <p:sp>
+        <p:nvSpPr>
+          <p:cNvPr id="20" name="Text 18"/>
+          <p:cNvSpPr txBox="1"/>
+          <p:nvPr/>
+        </p:nvSpPr>
+        <p:spPr>
+          <a:xfrm>
+            <a:off x="1417320" y="4069080"/>
+            <a:ext cx="10058400" cy="731520"/>
           </a:xfrm>
           <a:prstGeom prst="rect">
             <a:avLst/>
@@ -3622,79 +4465,40 @@
           <a:lstStyle/>
           <a:p>
             <a:pPr indent="0" marL="0">
-              <a:buNone/>
-            </a:pPr>
-            <a:r>
-              <a:rPr lang="en-US" sz="1600" b="1" dirty="0">
-                <a:solidFill>
-                  <a:srgbClr val="2D63FF"/>
+              <a:lnSpc>
+                <a:spcPct val="115000"/>
+              </a:lnSpc>
+              <a:buNone/>
+            </a:pPr>
+            <a:r>
+              <a:rPr lang="en-US" sz="1700" dirty="0">
+                <a:solidFill>
+                  <a:srgbClr val="101828"/>
                 </a:solidFill>
                 <a:latin typeface="IBM Plex Sans" pitchFamily="34" charset="0"/>
                 <a:ea typeface="IBM Plex Sans" pitchFamily="34" charset="-122"/>
                 <a:cs typeface="IBM Plex Sans" pitchFamily="34" charset="-120"/>
               </a:rPr>
-              <a:t>Marks for arguing</a:t>
-            </a:r>
-            <a:endParaRPr lang="en-US" sz="1600" dirty="0"/>
-          </a:p>
-        </p:txBody>
-      </p:sp>
-      <p:sp>
-        <p:nvSpPr>
-          <p:cNvPr id="15" name="Text 13"/>
-          <p:cNvSpPr txBox="1"/>
-          <p:nvPr/>
-        </p:nvSpPr>
-        <p:spPr>
-          <a:xfrm>
-            <a:off x="822960" y="4361688"/>
-            <a:ext cx="4754880" cy="1005840"/>
-          </a:xfrm>
-          <a:prstGeom prst="rect">
-            <a:avLst/>
-          </a:prstGeom>
-          <a:noFill/>
-          <a:ln/>
-        </p:spPr>
-        <p:txBody>
-          <a:bodyPr wrap="square" lIns="0" tIns="0" rIns="0" bIns="0" rtlCol="0" anchor="t"/>
-          <a:lstStyle/>
-          <a:p>
-            <a:pPr indent="0" marL="0">
-              <a:lnSpc>
-                <a:spcPct val="120000"/>
-              </a:lnSpc>
-              <a:buNone/>
-            </a:pPr>
-            <a:r>
-              <a:rPr lang="en-US" sz="1300" dirty="0">
-                <a:solidFill>
-                  <a:srgbClr val="667085"/>
-                </a:solidFill>
-                <a:latin typeface="IBM Plex Sans" pitchFamily="34" charset="0"/>
-                <a:ea typeface="IBM Plex Sans" pitchFamily="34" charset="-122"/>
-                <a:cs typeface="IBM Plex Sans" pitchFamily="34" charset="-120"/>
-              </a:rPr>
-              <a:t>Impact questions are among the highest-mark questions on the paper, and the marks are for reasoning rather than recall.</a:t>
-            </a:r>
-            <a:endParaRPr lang="en-US" sz="1300" dirty="0"/>
-          </a:p>
-        </p:txBody>
-      </p:sp>
-      <p:sp>
-        <p:nvSpPr>
-          <p:cNvPr id="16" name="Shape 14"/>
+              <a:t>They test spelling</a:t>
+            </a:r>
+            <a:endParaRPr lang="en-US" sz="1700" dirty="0"/>
+          </a:p>
+        </p:txBody>
+      </p:sp>
+      <p:sp>
+        <p:nvSpPr>
+          <p:cNvPr id="21" name="Shape 19"/>
           <p:cNvSpPr/>
           <p:nvPr/>
         </p:nvSpPr>
         <p:spPr>
           <a:xfrm>
-            <a:off x="6217920" y="3794760"/>
-            <a:ext cx="5394960" cy="1737360"/>
+            <a:off x="502920" y="4937760"/>
+            <a:ext cx="11155680" cy="731520"/>
           </a:xfrm>
           <a:prstGeom prst="roundRect">
             <a:avLst>
-              <a:gd name="adj" fmla="val 6316"/>
+              <a:gd name="adj" fmla="val 15000"/>
             </a:avLst>
           </a:prstGeom>
           <a:solidFill>
@@ -3702,7 +4506,7 @@
           </a:solidFill>
           <a:ln w="15875">
             <a:solidFill>
-              <a:srgbClr val="08A6A6"/>
+              <a:srgbClr val="D9DEE7"/>
             </a:solidFill>
             <a:prstDash val="solid"/>
           </a:ln>
@@ -3710,14 +4514,75 @@
       </p:sp>
       <p:sp>
         <p:nvSpPr>
-          <p:cNvPr id="17" name="Text 15"/>
-          <p:cNvSpPr txBox="1"/>
-          <p:nvPr/>
-        </p:nvSpPr>
-        <p:spPr>
-          <a:xfrm>
-            <a:off x="6537960" y="3977640"/>
-            <a:ext cx="4754880" cy="365760"/>
+          <p:cNvPr id="22" name="Shape 20"/>
+          <p:cNvSpPr/>
+          <p:nvPr/>
+        </p:nvSpPr>
+        <p:spPr>
+          <a:xfrm>
+            <a:off x="777240" y="5084064"/>
+            <a:ext cx="438912" cy="438912"/>
+          </a:xfrm>
+          <a:prstGeom prst="roundRect">
+            <a:avLst>
+              <a:gd name="adj" fmla="val 20833"/>
+            </a:avLst>
+          </a:prstGeom>
+          <a:solidFill>
+            <a:srgbClr val="EEF2FB"/>
+          </a:solidFill>
+          <a:ln/>
+        </p:spPr>
+      </p:sp>
+      <p:sp>
+        <p:nvSpPr>
+          <p:cNvPr id="23" name="Text 21"/>
+          <p:cNvSpPr txBox="1"/>
+          <p:nvPr/>
+        </p:nvSpPr>
+        <p:spPr>
+          <a:xfrm>
+            <a:off x="777240" y="5084064"/>
+            <a:ext cx="438912" cy="438912"/>
+          </a:xfrm>
+          <a:prstGeom prst="rect">
+            <a:avLst/>
+          </a:prstGeom>
+          <a:noFill/>
+          <a:ln/>
+        </p:spPr>
+        <p:txBody>
+          <a:bodyPr wrap="square" lIns="0" tIns="0" rIns="0" bIns="0" rtlCol="0" anchor="ctr"/>
+          <a:lstStyle/>
+          <a:p>
+            <a:pPr algn="ctr" indent="0" marL="0">
+              <a:buNone/>
+            </a:pPr>
+            <a:r>
+              <a:rPr lang="en-US" sz="1300" b="1" dirty="0">
+                <a:solidFill>
+                  <a:srgbClr val="2D63FF"/>
+                </a:solidFill>
+                <a:latin typeface="IBM Plex Mono" pitchFamily="34" charset="0"/>
+                <a:ea typeface="IBM Plex Mono" pitchFamily="34" charset="-122"/>
+                <a:cs typeface="IBM Plex Mono" pitchFamily="34" charset="-120"/>
+              </a:rPr>
+              <a:t>D</a:t>
+            </a:r>
+            <a:endParaRPr lang="en-US" sz="1300" dirty="0"/>
+          </a:p>
+        </p:txBody>
+      </p:sp>
+      <p:sp>
+        <p:nvSpPr>
+          <p:cNvPr id="24" name="Text 22"/>
+          <p:cNvSpPr txBox="1"/>
+          <p:nvPr/>
+        </p:nvSpPr>
+        <p:spPr>
+          <a:xfrm>
+            <a:off x="1417320" y="4937760"/>
+            <a:ext cx="10058400" cy="731520"/>
           </a:xfrm>
           <a:prstGeom prst="rect">
             <a:avLst/>
@@ -3730,62 +4595,23 @@
           <a:lstStyle/>
           <a:p>
             <a:pPr indent="0" marL="0">
-              <a:buNone/>
-            </a:pPr>
-            <a:r>
-              <a:rPr lang="en-US" sz="1600" b="1" dirty="0">
-                <a:solidFill>
-                  <a:srgbClr val="08A6A6"/>
+              <a:lnSpc>
+                <a:spcPct val="115000"/>
+              </a:lnSpc>
+              <a:buNone/>
+            </a:pPr>
+            <a:r>
+              <a:rPr lang="en-US" sz="1700" dirty="0">
+                <a:solidFill>
+                  <a:srgbClr val="101828"/>
                 </a:solidFill>
                 <a:latin typeface="IBM Plex Sans" pitchFamily="34" charset="0"/>
                 <a:ea typeface="IBM Plex Sans" pitchFamily="34" charset="-122"/>
                 <a:cs typeface="IBM Plex Sans" pitchFamily="34" charset="-120"/>
               </a:rPr>
-              <a:t>Stakeholders in law</a:t>
-            </a:r>
-            <a:endParaRPr lang="en-US" sz="1600" dirty="0"/>
-          </a:p>
-        </p:txBody>
-      </p:sp>
-      <p:sp>
-        <p:nvSpPr>
-          <p:cNvPr id="18" name="Text 16"/>
-          <p:cNvSpPr txBox="1"/>
-          <p:nvPr/>
-        </p:nvSpPr>
-        <p:spPr>
-          <a:xfrm>
-            <a:off x="6537960" y="4361688"/>
-            <a:ext cx="4754880" cy="1005840"/>
-          </a:xfrm>
-          <a:prstGeom prst="rect">
-            <a:avLst/>
-          </a:prstGeom>
-          <a:noFill/>
-          <a:ln/>
-        </p:spPr>
-        <p:txBody>
-          <a:bodyPr wrap="square" lIns="0" tIns="0" rIns="0" bIns="0" rtlCol="0" anchor="t"/>
-          <a:lstStyle/>
-          <a:p>
-            <a:pPr indent="0" marL="0">
-              <a:lnSpc>
-                <a:spcPct val="120000"/>
-              </a:lnSpc>
-              <a:buNone/>
-            </a:pPr>
-            <a:r>
-              <a:rPr lang="en-US" sz="1300" dirty="0">
-                <a:solidFill>
-                  <a:srgbClr val="667085"/>
-                </a:solidFill>
-                <a:latin typeface="IBM Plex Sans" pitchFamily="34" charset="0"/>
-                <a:ea typeface="IBM Plex Sans" pitchFamily="34" charset="-122"/>
-                <a:cs typeface="IBM Plex Sans" pitchFamily="34" charset="-120"/>
-              </a:rPr>
-              <a:t>Big public projects legally require consultation with the people affected, which is stakeholder analysis by another name.</a:t>
-            </a:r>
-            <a:endParaRPr lang="en-US" sz="1300" dirty="0"/>
+              <a:t>They ask you to weigh competing points and reach a justified conclusion</a:t>
+            </a:r>
+            <a:endParaRPr lang="en-US" sz="1700" dirty="0"/>
           </a:p>
         </p:txBody>
       </p:sp>
@@ -3921,14 +4747,75 @@
       </p:sp>
       <p:sp>
         <p:nvSpPr>
-          <p:cNvPr id="5" name="Text 3"/>
-          <p:cNvSpPr txBox="1"/>
-          <p:nvPr/>
-        </p:nvSpPr>
-        <p:spPr>
-          <a:xfrm>
-            <a:off x="502920" y="411480"/>
-            <a:ext cx="11155680" cy="777240"/>
+          <p:cNvPr id="5" name="Shape 3"/>
+          <p:cNvSpPr/>
+          <p:nvPr/>
+        </p:nvSpPr>
+        <p:spPr>
+          <a:xfrm>
+            <a:off x="502920" y="438912"/>
+            <a:ext cx="3108960" cy="502920"/>
+          </a:xfrm>
+          <a:prstGeom prst="roundRect">
+            <a:avLst>
+              <a:gd name="adj" fmla="val 18182"/>
+            </a:avLst>
+          </a:prstGeom>
+          <a:solidFill>
+            <a:srgbClr val="F4B942"/>
+          </a:solidFill>
+          <a:ln/>
+        </p:spPr>
+      </p:sp>
+      <p:sp>
+        <p:nvSpPr>
+          <p:cNvPr id="6" name="Text 4"/>
+          <p:cNvSpPr txBox="1"/>
+          <p:nvPr/>
+        </p:nvSpPr>
+        <p:spPr>
+          <a:xfrm>
+            <a:off x="502920" y="438912"/>
+            <a:ext cx="3108960" cy="502920"/>
+          </a:xfrm>
+          <a:prstGeom prst="rect">
+            <a:avLst/>
+          </a:prstGeom>
+          <a:noFill/>
+          <a:ln/>
+        </p:spPr>
+        <p:txBody>
+          <a:bodyPr wrap="square" lIns="0" tIns="0" rIns="0" bIns="0" rtlCol="0" anchor="ctr"/>
+          <a:lstStyle/>
+          <a:p>
+            <a:pPr algn="ctr" indent="0" marL="0">
+              <a:buNone/>
+            </a:pPr>
+            <a:r>
+              <a:rPr lang="en-US" sz="1300" b="1" dirty="0">
+                <a:solidFill>
+                  <a:srgbClr val="101828"/>
+                </a:solidFill>
+                <a:latin typeface="IBM Plex Mono" pitchFamily="34" charset="0"/>
+                <a:ea typeface="IBM Plex Mono" pitchFamily="34" charset="-122"/>
+                <a:cs typeface="IBM Plex Mono" pitchFamily="34" charset="-120"/>
+              </a:rPr>
+              <a:t>★  FINAL CHALLENGE</a:t>
+            </a:r>
+            <a:endParaRPr lang="en-US" sz="1300" dirty="0"/>
+          </a:p>
+        </p:txBody>
+      </p:sp>
+      <p:sp>
+        <p:nvSpPr>
+          <p:cNvPr id="7" name="Text 5"/>
+          <p:cNvSpPr txBox="1"/>
+          <p:nvPr/>
+        </p:nvSpPr>
+        <p:spPr>
+          <a:xfrm>
+            <a:off x="502920" y="1097280"/>
+            <a:ext cx="11155680" cy="731520"/>
           </a:xfrm>
           <a:prstGeom prst="rect">
             <a:avLst/>
@@ -3944,7 +4831,7 @@
               <a:buNone/>
             </a:pPr>
             <a:r>
-              <a:rPr lang="en-US" sz="3200" b="1" dirty="0">
+              <a:rPr lang="en-US" sz="3400" b="1" dirty="0">
                 <a:solidFill>
                   <a:srgbClr val="101828"/>
                 </a:solidFill>
@@ -3952,65 +4839,26 @@
                 <a:ea typeface="IBM Plex Sans" pitchFamily="34" charset="-122"/>
                 <a:cs typeface="IBM Plex Sans" pitchFamily="34" charset="-120"/>
               </a:rPr>
-              <a:t>Exam practice</a:t>
-            </a:r>
-            <a:endParaRPr lang="en-US" sz="3200" dirty="0"/>
-          </a:p>
-        </p:txBody>
-      </p:sp>
-      <p:sp>
-        <p:nvSpPr>
-          <p:cNvPr id="6" name="Text 4"/>
-          <p:cNvSpPr txBox="1"/>
-          <p:nvPr/>
-        </p:nvSpPr>
-        <p:spPr>
-          <a:xfrm>
-            <a:off x="502920" y="1170432"/>
-            <a:ext cx="11155680" cy="411480"/>
-          </a:xfrm>
-          <a:prstGeom prst="rect">
-            <a:avLst/>
-          </a:prstGeom>
-          <a:noFill/>
-          <a:ln/>
-        </p:spPr>
-        <p:txBody>
-          <a:bodyPr wrap="square" lIns="0" tIns="0" rIns="0" bIns="0" rtlCol="0" anchor="ctr"/>
-          <a:lstStyle/>
-          <a:p>
-            <a:pPr indent="0" marL="0">
-              <a:buNone/>
-            </a:pPr>
-            <a:r>
-              <a:rPr lang="en-US" sz="1500" dirty="0">
-                <a:solidFill>
-                  <a:srgbClr val="667085"/>
-                </a:solidFill>
-                <a:latin typeface="IBM Plex Sans" pitchFamily="34" charset="0"/>
-                <a:ea typeface="IBM Plex Sans" pitchFamily="34" charset="-122"/>
-                <a:cs typeface="IBM Plex Sans" pitchFamily="34" charset="-120"/>
-              </a:rPr>
-              <a:t>Devices away. Answer from memory on the worksheet.</a:t>
-            </a:r>
-            <a:endParaRPr lang="en-US" sz="1500" dirty="0"/>
-          </a:p>
-        </p:txBody>
-      </p:sp>
-      <p:sp>
-        <p:nvSpPr>
-          <p:cNvPr id="7" name="Shape 5"/>
+              <a:t>Sort the impacts</a:t>
+            </a:r>
+            <a:endParaRPr lang="en-US" sz="3400" dirty="0"/>
+          </a:p>
+        </p:txBody>
+      </p:sp>
+      <p:sp>
+        <p:nvSpPr>
+          <p:cNvPr id="8" name="Shape 6"/>
           <p:cNvSpPr/>
           <p:nvPr/>
         </p:nvSpPr>
         <p:spPr>
           <a:xfrm>
-            <a:off x="502920" y="1828800"/>
-            <a:ext cx="11155680" cy="1097280"/>
+            <a:off x="502920" y="2011680"/>
+            <a:ext cx="11155680" cy="2194560"/>
           </a:xfrm>
           <a:prstGeom prst="roundRect">
             <a:avLst>
-              <a:gd name="adj" fmla="val 10000"/>
+              <a:gd name="adj" fmla="val 5000"/>
             </a:avLst>
           </a:prstGeom>
           <a:solidFill>
@@ -4018,7 +4866,7 @@
           </a:solidFill>
           <a:ln w="15875">
             <a:solidFill>
-              <a:srgbClr val="D9DEE7"/>
+              <a:srgbClr val="2D63FF"/>
             </a:solidFill>
             <a:prstDash val="solid"/>
           </a:ln>
@@ -4026,14 +4874,14 @@
       </p:sp>
       <p:sp>
         <p:nvSpPr>
-          <p:cNvPr id="8" name="Text 6"/>
-          <p:cNvSpPr txBox="1"/>
-          <p:nvPr/>
-        </p:nvSpPr>
-        <p:spPr>
-          <a:xfrm>
-            <a:off x="914400" y="1938528"/>
-            <a:ext cx="9418320" cy="877824"/>
+          <p:cNvPr id="9" name="Text 7"/>
+          <p:cNvSpPr txBox="1"/>
+          <p:nvPr/>
+        </p:nvSpPr>
+        <p:spPr>
+          <a:xfrm>
+            <a:off x="1005840" y="2331720"/>
+            <a:ext cx="10149840" cy="1554480"/>
           </a:xfrm>
           <a:prstGeom prst="rect">
             <a:avLst/>
@@ -4047,12 +4895,12 @@
           <a:p>
             <a:pPr indent="0" marL="0">
               <a:lnSpc>
-                <a:spcPct val="118000"/>
+                <a:spcPct val="130000"/>
               </a:lnSpc>
               <a:buNone/>
             </a:pPr>
             <a:r>
-              <a:rPr lang="en-US" sz="1700" dirty="0">
+              <a:rPr lang="en-US" sz="2200" dirty="0">
                 <a:solidFill>
                   <a:srgbClr val="101828"/>
                 </a:solidFill>
@@ -4060,33 +4908,11 @@
                 <a:ea typeface="IBM Plex Sans" pitchFamily="34" charset="-122"/>
                 <a:cs typeface="IBM Plex Sans" pitchFamily="34" charset="-120"/>
               </a:rPr>
-              <a:t>State two kinds of impact that should be considered before a new technology is introduced.</a:t>
-            </a:r>
-            <a:endParaRPr lang="en-US" sz="1700" dirty="0"/>
-          </a:p>
-        </p:txBody>
-      </p:sp>
-      <p:sp>
-        <p:nvSpPr>
-          <p:cNvPr id="9" name="Shape 7"/>
-          <p:cNvSpPr/>
-          <p:nvPr/>
-        </p:nvSpPr>
-        <p:spPr>
-          <a:xfrm>
-            <a:off x="10515600" y="2130552"/>
-            <a:ext cx="868680" cy="493776"/>
-          </a:xfrm>
-          <a:prstGeom prst="roundRect">
-            <a:avLst>
-              <a:gd name="adj" fmla="val 18519"/>
-            </a:avLst>
-          </a:prstGeom>
-          <a:solidFill>
-            <a:srgbClr val="EEF2FB"/>
-          </a:solidFill>
-          <a:ln/>
-        </p:spPr>
+              <a:t>Eight concerns about new technologies. Tap the star and sort each into the kind of impact it is.</a:t>
+            </a:r>
+            <a:endParaRPr lang="en-US" sz="2200" dirty="0"/>
+          </a:p>
+        </p:txBody>
       </p:sp>
       <p:sp>
         <p:nvSpPr>
@@ -4096,74 +4922,8 @@
         </p:nvSpPr>
         <p:spPr>
           <a:xfrm>
-            <a:off x="10515600" y="2130552"/>
-            <a:ext cx="868680" cy="493776"/>
-          </a:xfrm>
-          <a:prstGeom prst="rect">
-            <a:avLst/>
-          </a:prstGeom>
-          <a:noFill/>
-          <a:ln/>
-        </p:spPr>
-        <p:txBody>
-          <a:bodyPr wrap="square" lIns="0" tIns="0" rIns="0" bIns="0" rtlCol="0" anchor="ctr"/>
-          <a:lstStyle/>
-          <a:p>
-            <a:pPr algn="ctr" indent="0" marL="0">
-              <a:buNone/>
-            </a:pPr>
-            <a:r>
-              <a:rPr lang="en-US" sz="1500" b="1" dirty="0">
-                <a:solidFill>
-                  <a:srgbClr val="2D63FF"/>
-                </a:solidFill>
-                <a:latin typeface="IBM Plex Mono" pitchFamily="34" charset="0"/>
-                <a:ea typeface="IBM Plex Mono" pitchFamily="34" charset="-122"/>
-                <a:cs typeface="IBM Plex Mono" pitchFamily="34" charset="-120"/>
-              </a:rPr>
-              <a:t>[2]</a:t>
-            </a:r>
-            <a:endParaRPr lang="en-US" sz="1500" dirty="0"/>
-          </a:p>
-        </p:txBody>
-      </p:sp>
-      <p:sp>
-        <p:nvSpPr>
-          <p:cNvPr id="11" name="Shape 9"/>
-          <p:cNvSpPr/>
-          <p:nvPr/>
-        </p:nvSpPr>
-        <p:spPr>
-          <a:xfrm>
-            <a:off x="502920" y="3127248"/>
-            <a:ext cx="11155680" cy="1097280"/>
-          </a:xfrm>
-          <a:prstGeom prst="roundRect">
-            <a:avLst>
-              <a:gd name="adj" fmla="val 10000"/>
-            </a:avLst>
-          </a:prstGeom>
-          <a:solidFill>
-            <a:srgbClr val="FFFFFF"/>
-          </a:solidFill>
-          <a:ln w="15875">
-            <a:solidFill>
-              <a:srgbClr val="D9DEE7"/>
-            </a:solidFill>
-            <a:prstDash val="solid"/>
-          </a:ln>
-        </p:spPr>
-      </p:sp>
-      <p:sp>
-        <p:nvSpPr>
-          <p:cNvPr id="12" name="Text 10"/>
-          <p:cNvSpPr txBox="1"/>
-          <p:nvPr/>
-        </p:nvSpPr>
-        <p:spPr>
-          <a:xfrm>
-            <a:off x="914400" y="3236976"/>
-            <a:ext cx="9418320" cy="877824"/>
+            <a:off x="502920" y="4526280"/>
+            <a:ext cx="11155680" cy="457200"/>
           </a:xfrm>
           <a:prstGeom prst="rect">
             <a:avLst/>
@@ -4176,214 +4936,20 @@
           <a:lstStyle/>
           <a:p>
             <a:pPr indent="0" marL="0">
-              <a:lnSpc>
-                <a:spcPct val="118000"/>
-              </a:lnSpc>
-              <a:buNone/>
-            </a:pPr>
-            <a:r>
-              <a:rPr lang="en-US" sz="1700" dirty="0">
-                <a:solidFill>
-                  <a:srgbClr val="101828"/>
+              <a:buNone/>
+            </a:pPr>
+            <a:r>
+              <a:rPr lang="en-US" sz="1600" dirty="0">
+                <a:solidFill>
+                  <a:srgbClr val="667085"/>
                 </a:solidFill>
                 <a:latin typeface="IBM Plex Sans" pitchFamily="34" charset="0"/>
                 <a:ea typeface="IBM Plex Sans" pitchFamily="34" charset="-122"/>
                 <a:cs typeface="IBM Plex Sans" pitchFamily="34" charset="-120"/>
               </a:rPr>
-              <a:t>Explain what is meant by a stakeholder, using an example.</a:t>
-            </a:r>
-            <a:endParaRPr lang="en-US" sz="1700" dirty="0"/>
-          </a:p>
-        </p:txBody>
-      </p:sp>
-      <p:sp>
-        <p:nvSpPr>
-          <p:cNvPr id="13" name="Shape 11"/>
-          <p:cNvSpPr/>
-          <p:nvPr/>
-        </p:nvSpPr>
-        <p:spPr>
-          <a:xfrm>
-            <a:off x="10515600" y="3429000"/>
-            <a:ext cx="868680" cy="493776"/>
-          </a:xfrm>
-          <a:prstGeom prst="roundRect">
-            <a:avLst>
-              <a:gd name="adj" fmla="val 18519"/>
-            </a:avLst>
-          </a:prstGeom>
-          <a:solidFill>
-            <a:srgbClr val="EEF2FB"/>
-          </a:solidFill>
-          <a:ln/>
-        </p:spPr>
-      </p:sp>
-      <p:sp>
-        <p:nvSpPr>
-          <p:cNvPr id="14" name="Text 12"/>
-          <p:cNvSpPr txBox="1"/>
-          <p:nvPr/>
-        </p:nvSpPr>
-        <p:spPr>
-          <a:xfrm>
-            <a:off x="10515600" y="3429000"/>
-            <a:ext cx="868680" cy="493776"/>
-          </a:xfrm>
-          <a:prstGeom prst="rect">
-            <a:avLst/>
-          </a:prstGeom>
-          <a:noFill/>
-          <a:ln/>
-        </p:spPr>
-        <p:txBody>
-          <a:bodyPr wrap="square" lIns="0" tIns="0" rIns="0" bIns="0" rtlCol="0" anchor="ctr"/>
-          <a:lstStyle/>
-          <a:p>
-            <a:pPr algn="ctr" indent="0" marL="0">
-              <a:buNone/>
-            </a:pPr>
-            <a:r>
-              <a:rPr lang="en-US" sz="1500" b="1" dirty="0">
-                <a:solidFill>
-                  <a:srgbClr val="2D63FF"/>
-                </a:solidFill>
-                <a:latin typeface="IBM Plex Mono" pitchFamily="34" charset="0"/>
-                <a:ea typeface="IBM Plex Mono" pitchFamily="34" charset="-122"/>
-                <a:cs typeface="IBM Plex Mono" pitchFamily="34" charset="-120"/>
-              </a:rPr>
-              <a:t>[2]</a:t>
-            </a:r>
-            <a:endParaRPr lang="en-US" sz="1500" dirty="0"/>
-          </a:p>
-        </p:txBody>
-      </p:sp>
-      <p:sp>
-        <p:nvSpPr>
-          <p:cNvPr id="15" name="Shape 13"/>
-          <p:cNvSpPr/>
-          <p:nvPr/>
-        </p:nvSpPr>
-        <p:spPr>
-          <a:xfrm>
-            <a:off x="502920" y="4425696"/>
-            <a:ext cx="11155680" cy="1097280"/>
-          </a:xfrm>
-          <a:prstGeom prst="roundRect">
-            <a:avLst>
-              <a:gd name="adj" fmla="val 10000"/>
-            </a:avLst>
-          </a:prstGeom>
-          <a:solidFill>
-            <a:srgbClr val="FFFFFF"/>
-          </a:solidFill>
-          <a:ln w="15875">
-            <a:solidFill>
-              <a:srgbClr val="D9DEE7"/>
-            </a:solidFill>
-            <a:prstDash val="solid"/>
-          </a:ln>
-        </p:spPr>
-      </p:sp>
-      <p:sp>
-        <p:nvSpPr>
-          <p:cNvPr id="16" name="Text 14"/>
-          <p:cNvSpPr txBox="1"/>
-          <p:nvPr/>
-        </p:nvSpPr>
-        <p:spPr>
-          <a:xfrm>
-            <a:off x="914400" y="4535424"/>
-            <a:ext cx="9418320" cy="877824"/>
-          </a:xfrm>
-          <a:prstGeom prst="rect">
-            <a:avLst/>
-          </a:prstGeom>
-          <a:noFill/>
-          <a:ln/>
-        </p:spPr>
-        <p:txBody>
-          <a:bodyPr wrap="square" lIns="0" tIns="0" rIns="0" bIns="0" rtlCol="0" anchor="ctr"/>
-          <a:lstStyle/>
-          <a:p>
-            <a:pPr indent="0" marL="0">
-              <a:lnSpc>
-                <a:spcPct val="118000"/>
-              </a:lnSpc>
-              <a:buNone/>
-            </a:pPr>
-            <a:r>
-              <a:rPr lang="en-US" sz="1700" dirty="0">
-                <a:solidFill>
-                  <a:srgbClr val="101828"/>
-                </a:solidFill>
-                <a:latin typeface="IBM Plex Sans" pitchFamily="34" charset="0"/>
-                <a:ea typeface="IBM Plex Sans" pitchFamily="34" charset="-122"/>
-                <a:cs typeface="IBM Plex Sans" pitchFamily="34" charset="-120"/>
-              </a:rPr>
-              <a:t>A council plans to put cameras with facial recognition in the town centre. Discuss the impacts of this decision.</a:t>
-            </a:r>
-            <a:endParaRPr lang="en-US" sz="1700" dirty="0"/>
-          </a:p>
-        </p:txBody>
-      </p:sp>
-      <p:sp>
-        <p:nvSpPr>
-          <p:cNvPr id="17" name="Shape 15"/>
-          <p:cNvSpPr/>
-          <p:nvPr/>
-        </p:nvSpPr>
-        <p:spPr>
-          <a:xfrm>
-            <a:off x="10515600" y="4727448"/>
-            <a:ext cx="868680" cy="493776"/>
-          </a:xfrm>
-          <a:prstGeom prst="roundRect">
-            <a:avLst>
-              <a:gd name="adj" fmla="val 18519"/>
-            </a:avLst>
-          </a:prstGeom>
-          <a:solidFill>
-            <a:srgbClr val="EEF2FB"/>
-          </a:solidFill>
-          <a:ln/>
-        </p:spPr>
-      </p:sp>
-      <p:sp>
-        <p:nvSpPr>
-          <p:cNvPr id="18" name="Text 16"/>
-          <p:cNvSpPr txBox="1"/>
-          <p:nvPr/>
-        </p:nvSpPr>
-        <p:spPr>
-          <a:xfrm>
-            <a:off x="10515600" y="4727448"/>
-            <a:ext cx="868680" cy="493776"/>
-          </a:xfrm>
-          <a:prstGeom prst="rect">
-            <a:avLst/>
-          </a:prstGeom>
-          <a:noFill/>
-          <a:ln/>
-        </p:spPr>
-        <p:txBody>
-          <a:bodyPr wrap="square" lIns="0" tIns="0" rIns="0" bIns="0" rtlCol="0" anchor="ctr"/>
-          <a:lstStyle/>
-          <a:p>
-            <a:pPr algn="ctr" indent="0" marL="0">
-              <a:buNone/>
-            </a:pPr>
-            <a:r>
-              <a:rPr lang="en-US" sz="1500" b="1" dirty="0">
-                <a:solidFill>
-                  <a:srgbClr val="2D63FF"/>
-                </a:solidFill>
-                <a:latin typeface="IBM Plex Mono" pitchFamily="34" charset="0"/>
-                <a:ea typeface="IBM Plex Mono" pitchFamily="34" charset="-122"/>
-                <a:cs typeface="IBM Plex Mono" pitchFamily="34" charset="-120"/>
-              </a:rPr>
-              <a:t>[8]</a:t>
-            </a:r>
-            <a:endParaRPr lang="en-US" sz="1500" dirty="0"/>
+              <a:t>Predict on paper first, then look down and test it.</a:t>
+            </a:r>
+            <a:endParaRPr lang="en-US" sz="1600" dirty="0"/>
           </a:p>
         </p:txBody>
       </p:sp>
@@ -4398,6 +4964,1244 @@
 <file path=ppt/slides/slide14.xml><?xml version="1.0" encoding="utf-8"?>
 <p:sld xmlns:a="http://schemas.openxmlformats.org/drawingml/2006/main" xmlns:r="http://schemas.openxmlformats.org/officeDocument/2006/relationships" xmlns:p="http://schemas.openxmlformats.org/presentationml/2006/main">
   <p:cSld name="Slide 14">
+    <p:bg>
+      <p:bgPr>
+        <a:solidFill>
+          <a:srgbClr val="F7F7F4"/>
+        </a:solidFill>
+      </p:bgPr>
+    </p:bg>
+    <p:spTree>
+      <p:nvGrpSpPr>
+        <p:cNvPr id="1" name=""/>
+        <p:cNvGrpSpPr/>
+        <p:nvPr/>
+      </p:nvGrpSpPr>
+      <p:grpSpPr>
+        <a:xfrm>
+          <a:off x="0" y="0"/>
+          <a:ext cx="0" cy="0"/>
+          <a:chOff x="0" y="0"/>
+          <a:chExt cx="0" cy="0"/>
+        </a:xfrm>
+      </p:grpSpPr>
+      <p:sp>
+        <p:nvSpPr>
+          <p:cNvPr id="2" name="Shape 0"/>
+          <p:cNvSpPr/>
+          <p:nvPr/>
+        </p:nvSpPr>
+        <p:spPr>
+          <a:xfrm>
+            <a:off x="0" y="0"/>
+            <a:ext cx="12188952" cy="82296"/>
+          </a:xfrm>
+          <a:prstGeom prst="rect">
+            <a:avLst/>
+          </a:prstGeom>
+          <a:solidFill>
+            <a:srgbClr val="2D63FF"/>
+          </a:solidFill>
+          <a:ln/>
+        </p:spPr>
+      </p:sp>
+      <p:sp>
+        <p:nvSpPr>
+          <p:cNvPr id="3" name="Text 1"/>
+          <p:cNvSpPr txBox="1"/>
+          <p:nvPr/>
+        </p:nvSpPr>
+        <p:spPr>
+          <a:xfrm>
+            <a:off x="502920" y="6236208"/>
+            <a:ext cx="7772400" cy="365760"/>
+          </a:xfrm>
+          <a:prstGeom prst="rect">
+            <a:avLst/>
+          </a:prstGeom>
+          <a:noFill/>
+          <a:ln/>
+        </p:spPr>
+        <p:txBody>
+          <a:bodyPr wrap="square" lIns="0" tIns="0" rIns="0" bIns="0" rtlCol="0" anchor="ctr"/>
+          <a:lstStyle/>
+          <a:p>
+            <a:pPr indent="0" marL="0">
+              <a:buNone/>
+            </a:pPr>
+            <a:r>
+              <a:rPr lang="en-US" sz="1100" dirty="0">
+                <a:solidFill>
+                  <a:srgbClr val="667085"/>
+                </a:solidFill>
+                <a:latin typeface="IBM Plex Mono" pitchFamily="34" charset="0"/>
+                <a:ea typeface="IBM Plex Mono" pitchFamily="34" charset="-122"/>
+                <a:cs typeface="IBM Plex Mono" pitchFamily="34" charset="-120"/>
+              </a:rPr>
+              <a:t>1.6 Ethical, legal, cultural and environmental impacts  |  Lesson 1</a:t>
+            </a:r>
+            <a:endParaRPr lang="en-US" sz="1100" dirty="0"/>
+          </a:p>
+        </p:txBody>
+      </p:sp>
+      <p:sp>
+        <p:nvSpPr>
+          <p:cNvPr id="4" name="Text 2"/>
+          <p:cNvSpPr txBox="1"/>
+          <p:nvPr/>
+        </p:nvSpPr>
+        <p:spPr>
+          <a:xfrm>
+            <a:off x="9326880" y="6236208"/>
+            <a:ext cx="2377440" cy="365760"/>
+          </a:xfrm>
+          <a:prstGeom prst="rect">
+            <a:avLst/>
+          </a:prstGeom>
+          <a:noFill/>
+          <a:ln/>
+        </p:spPr>
+        <p:txBody>
+          <a:bodyPr wrap="square" lIns="0" tIns="0" rIns="0" bIns="0" rtlCol="0" anchor="ctr"/>
+          <a:lstStyle/>
+          <a:p>
+            <a:pPr algn="r" indent="0" marL="0">
+              <a:buNone/>
+            </a:pPr>
+            <a:r>
+              <a:rPr lang="en-US" sz="1100" dirty="0">
+                <a:solidFill>
+                  <a:srgbClr val="667085"/>
+                </a:solidFill>
+                <a:latin typeface="IBM Plex Mono" pitchFamily="34" charset="0"/>
+                <a:ea typeface="IBM Plex Mono" pitchFamily="34" charset="-122"/>
+                <a:cs typeface="IBM Plex Mono" pitchFamily="34" charset="-120"/>
+              </a:rPr>
+              <a:t>Revise 360</a:t>
+            </a:r>
+            <a:endParaRPr lang="en-US" sz="1100" dirty="0"/>
+          </a:p>
+        </p:txBody>
+      </p:sp>
+      <p:sp>
+        <p:nvSpPr>
+          <p:cNvPr id="5" name="Text 3"/>
+          <p:cNvSpPr txBox="1"/>
+          <p:nvPr/>
+        </p:nvSpPr>
+        <p:spPr>
+          <a:xfrm>
+            <a:off x="502920" y="411480"/>
+            <a:ext cx="11155680" cy="777240"/>
+          </a:xfrm>
+          <a:prstGeom prst="rect">
+            <a:avLst/>
+          </a:prstGeom>
+          <a:noFill/>
+          <a:ln/>
+        </p:spPr>
+        <p:txBody>
+          <a:bodyPr wrap="square" lIns="0" tIns="0" rIns="0" bIns="0" rtlCol="0" anchor="ctr"/>
+          <a:lstStyle/>
+          <a:p>
+            <a:pPr indent="0" marL="0">
+              <a:buNone/>
+            </a:pPr>
+            <a:r>
+              <a:rPr lang="en-US" sz="3200" b="1" dirty="0">
+                <a:solidFill>
+                  <a:srgbClr val="101828"/>
+                </a:solidFill>
+                <a:latin typeface="IBM Plex Sans" pitchFamily="34" charset="0"/>
+                <a:ea typeface="IBM Plex Sans" pitchFamily="34" charset="-122"/>
+                <a:cs typeface="IBM Plex Sans" pitchFamily="34" charset="-120"/>
+              </a:rPr>
+              <a:t>Worth knowing</a:t>
+            </a:r>
+            <a:endParaRPr lang="en-US" sz="3200" dirty="0"/>
+          </a:p>
+        </p:txBody>
+      </p:sp>
+      <p:sp>
+        <p:nvSpPr>
+          <p:cNvPr id="6" name="Text 4"/>
+          <p:cNvSpPr txBox="1"/>
+          <p:nvPr/>
+        </p:nvSpPr>
+        <p:spPr>
+          <a:xfrm>
+            <a:off x="502920" y="1170432"/>
+            <a:ext cx="11155680" cy="411480"/>
+          </a:xfrm>
+          <a:prstGeom prst="rect">
+            <a:avLst/>
+          </a:prstGeom>
+          <a:noFill/>
+          <a:ln/>
+        </p:spPr>
+        <p:txBody>
+          <a:bodyPr wrap="square" lIns="0" tIns="0" rIns="0" bIns="0" rtlCol="0" anchor="ctr"/>
+          <a:lstStyle/>
+          <a:p>
+            <a:pPr indent="0" marL="0">
+              <a:buNone/>
+            </a:pPr>
+            <a:r>
+              <a:rPr lang="en-US" sz="1500" dirty="0">
+                <a:solidFill>
+                  <a:srgbClr val="667085"/>
+                </a:solidFill>
+                <a:latin typeface="IBM Plex Sans" pitchFamily="34" charset="0"/>
+                <a:ea typeface="IBM Plex Sans" pitchFamily="34" charset="-122"/>
+                <a:cs typeface="IBM Plex Sans" pitchFamily="34" charset="-120"/>
+              </a:rPr>
+              <a:t>The information markers dotted around the room</a:t>
+            </a:r>
+            <a:endParaRPr lang="en-US" sz="1500" dirty="0"/>
+          </a:p>
+        </p:txBody>
+      </p:sp>
+      <p:sp>
+        <p:nvSpPr>
+          <p:cNvPr id="7" name="Shape 5"/>
+          <p:cNvSpPr/>
+          <p:nvPr/>
+        </p:nvSpPr>
+        <p:spPr>
+          <a:xfrm>
+            <a:off x="502920" y="1828800"/>
+            <a:ext cx="5394960" cy="1737360"/>
+          </a:xfrm>
+          <a:prstGeom prst="roundRect">
+            <a:avLst>
+              <a:gd name="adj" fmla="val 6316"/>
+            </a:avLst>
+          </a:prstGeom>
+          <a:solidFill>
+            <a:srgbClr val="FFFFFF"/>
+          </a:solidFill>
+          <a:ln w="15875">
+            <a:solidFill>
+              <a:srgbClr val="2D63FF"/>
+            </a:solidFill>
+            <a:prstDash val="solid"/>
+          </a:ln>
+        </p:spPr>
+      </p:sp>
+      <p:sp>
+        <p:nvSpPr>
+          <p:cNvPr id="8" name="Text 6"/>
+          <p:cNvSpPr txBox="1"/>
+          <p:nvPr/>
+        </p:nvSpPr>
+        <p:spPr>
+          <a:xfrm>
+            <a:off x="822960" y="2011680"/>
+            <a:ext cx="4754880" cy="365760"/>
+          </a:xfrm>
+          <a:prstGeom prst="rect">
+            <a:avLst/>
+          </a:prstGeom>
+          <a:noFill/>
+          <a:ln/>
+        </p:spPr>
+        <p:txBody>
+          <a:bodyPr wrap="square" lIns="0" tIns="0" rIns="0" bIns="0" rtlCol="0" anchor="ctr"/>
+          <a:lstStyle/>
+          <a:p>
+            <a:pPr indent="0" marL="0">
+              <a:buNone/>
+            </a:pPr>
+            <a:r>
+              <a:rPr lang="en-US" sz="1600" b="1" dirty="0">
+                <a:solidFill>
+                  <a:srgbClr val="2D63FF"/>
+                </a:solidFill>
+                <a:latin typeface="IBM Plex Sans" pitchFamily="34" charset="0"/>
+                <a:ea typeface="IBM Plex Sans" pitchFamily="34" charset="-122"/>
+                <a:cs typeface="IBM Plex Sans" pitchFamily="34" charset="-120"/>
+              </a:rPr>
+              <a:t>Why this topic exists</a:t>
+            </a:r>
+            <a:endParaRPr lang="en-US" sz="1600" dirty="0"/>
+          </a:p>
+        </p:txBody>
+      </p:sp>
+      <p:sp>
+        <p:nvSpPr>
+          <p:cNvPr id="9" name="Text 7"/>
+          <p:cNvSpPr txBox="1"/>
+          <p:nvPr/>
+        </p:nvSpPr>
+        <p:spPr>
+          <a:xfrm>
+            <a:off x="822960" y="2395728"/>
+            <a:ext cx="4754880" cy="1005840"/>
+          </a:xfrm>
+          <a:prstGeom prst="rect">
+            <a:avLst/>
+          </a:prstGeom>
+          <a:noFill/>
+          <a:ln/>
+        </p:spPr>
+        <p:txBody>
+          <a:bodyPr wrap="square" lIns="0" tIns="0" rIns="0" bIns="0" rtlCol="0" anchor="t"/>
+          <a:lstStyle/>
+          <a:p>
+            <a:pPr indent="0" marL="0">
+              <a:lnSpc>
+                <a:spcPct val="120000"/>
+              </a:lnSpc>
+              <a:buNone/>
+            </a:pPr>
+            <a:r>
+              <a:rPr lang="en-US" sz="1300" dirty="0">
+                <a:solidFill>
+                  <a:srgbClr val="667085"/>
+                </a:solidFill>
+                <a:latin typeface="IBM Plex Sans" pitchFamily="34" charset="0"/>
+                <a:ea typeface="IBM Plex Sans" pitchFamily="34" charset="-122"/>
+                <a:cs typeface="IBM Plex Sans" pitchFamily="34" charset="-120"/>
+              </a:rPr>
+              <a:t>Every specification now includes impacts, because the people building systems are the ones who decide what gets built. The technical skill is only half the job.</a:t>
+            </a:r>
+            <a:endParaRPr lang="en-US" sz="1300" dirty="0"/>
+          </a:p>
+        </p:txBody>
+      </p:sp>
+      <p:sp>
+        <p:nvSpPr>
+          <p:cNvPr id="10" name="Shape 8"/>
+          <p:cNvSpPr/>
+          <p:nvPr/>
+        </p:nvSpPr>
+        <p:spPr>
+          <a:xfrm>
+            <a:off x="6217920" y="1828800"/>
+            <a:ext cx="5394960" cy="1737360"/>
+          </a:xfrm>
+          <a:prstGeom prst="roundRect">
+            <a:avLst>
+              <a:gd name="adj" fmla="val 6316"/>
+            </a:avLst>
+          </a:prstGeom>
+          <a:solidFill>
+            <a:srgbClr val="FFFFFF"/>
+          </a:solidFill>
+          <a:ln w="15875">
+            <a:solidFill>
+              <a:srgbClr val="08A6A6"/>
+            </a:solidFill>
+            <a:prstDash val="solid"/>
+          </a:ln>
+        </p:spPr>
+      </p:sp>
+      <p:sp>
+        <p:nvSpPr>
+          <p:cNvPr id="11" name="Text 9"/>
+          <p:cNvSpPr txBox="1"/>
+          <p:nvPr/>
+        </p:nvSpPr>
+        <p:spPr>
+          <a:xfrm>
+            <a:off x="6537960" y="2011680"/>
+            <a:ext cx="4754880" cy="365760"/>
+          </a:xfrm>
+          <a:prstGeom prst="rect">
+            <a:avLst/>
+          </a:prstGeom>
+          <a:noFill/>
+          <a:ln/>
+        </p:spPr>
+        <p:txBody>
+          <a:bodyPr wrap="square" lIns="0" tIns="0" rIns="0" bIns="0" rtlCol="0" anchor="ctr"/>
+          <a:lstStyle/>
+          <a:p>
+            <a:pPr indent="0" marL="0">
+              <a:buNone/>
+            </a:pPr>
+            <a:r>
+              <a:rPr lang="en-US" sz="1600" b="1" dirty="0">
+                <a:solidFill>
+                  <a:srgbClr val="08A6A6"/>
+                </a:solidFill>
+                <a:latin typeface="IBM Plex Sans" pitchFamily="34" charset="0"/>
+                <a:ea typeface="IBM Plex Sans" pitchFamily="34" charset="-122"/>
+                <a:cs typeface="IBM Plex Sans" pitchFamily="34" charset="-120"/>
+              </a:rPr>
+              <a:t>Trolley problems</a:t>
+            </a:r>
+            <a:endParaRPr lang="en-US" sz="1600" dirty="0"/>
+          </a:p>
+        </p:txBody>
+      </p:sp>
+      <p:sp>
+        <p:nvSpPr>
+          <p:cNvPr id="12" name="Text 10"/>
+          <p:cNvSpPr txBox="1"/>
+          <p:nvPr/>
+        </p:nvSpPr>
+        <p:spPr>
+          <a:xfrm>
+            <a:off x="6537960" y="2395728"/>
+            <a:ext cx="4754880" cy="1005840"/>
+          </a:xfrm>
+          <a:prstGeom prst="rect">
+            <a:avLst/>
+          </a:prstGeom>
+          <a:noFill/>
+          <a:ln/>
+        </p:spPr>
+        <p:txBody>
+          <a:bodyPr wrap="square" lIns="0" tIns="0" rIns="0" bIns="0" rtlCol="0" anchor="t"/>
+          <a:lstStyle/>
+          <a:p>
+            <a:pPr indent="0" marL="0">
+              <a:lnSpc>
+                <a:spcPct val="120000"/>
+              </a:lnSpc>
+              <a:buNone/>
+            </a:pPr>
+            <a:r>
+              <a:rPr lang="en-US" sz="1300" dirty="0">
+                <a:solidFill>
+                  <a:srgbClr val="667085"/>
+                </a:solidFill>
+                <a:latin typeface="IBM Plex Sans" pitchFamily="34" charset="0"/>
+                <a:ea typeface="IBM Plex Sans" pitchFamily="34" charset="-122"/>
+                <a:cs typeface="IBM Plex Sans" pitchFamily="34" charset="-120"/>
+              </a:rPr>
+              <a:t>Driverless cars force a decision nobody wants to write down: who a car should protect in a crash. Engineers really do have to choose.</a:t>
+            </a:r>
+            <a:endParaRPr lang="en-US" sz="1300" dirty="0"/>
+          </a:p>
+        </p:txBody>
+      </p:sp>
+      <p:sp>
+        <p:nvSpPr>
+          <p:cNvPr id="13" name="Shape 11"/>
+          <p:cNvSpPr/>
+          <p:nvPr/>
+        </p:nvSpPr>
+        <p:spPr>
+          <a:xfrm>
+            <a:off x="502920" y="3794760"/>
+            <a:ext cx="5394960" cy="1737360"/>
+          </a:xfrm>
+          <a:prstGeom prst="roundRect">
+            <a:avLst>
+              <a:gd name="adj" fmla="val 6316"/>
+            </a:avLst>
+          </a:prstGeom>
+          <a:solidFill>
+            <a:srgbClr val="FFFFFF"/>
+          </a:solidFill>
+          <a:ln w="15875">
+            <a:solidFill>
+              <a:srgbClr val="2D63FF"/>
+            </a:solidFill>
+            <a:prstDash val="solid"/>
+          </a:ln>
+        </p:spPr>
+      </p:sp>
+      <p:sp>
+        <p:nvSpPr>
+          <p:cNvPr id="14" name="Text 12"/>
+          <p:cNvSpPr txBox="1"/>
+          <p:nvPr/>
+        </p:nvSpPr>
+        <p:spPr>
+          <a:xfrm>
+            <a:off x="822960" y="3977640"/>
+            <a:ext cx="4754880" cy="365760"/>
+          </a:xfrm>
+          <a:prstGeom prst="rect">
+            <a:avLst/>
+          </a:prstGeom>
+          <a:noFill/>
+          <a:ln/>
+        </p:spPr>
+        <p:txBody>
+          <a:bodyPr wrap="square" lIns="0" tIns="0" rIns="0" bIns="0" rtlCol="0" anchor="ctr"/>
+          <a:lstStyle/>
+          <a:p>
+            <a:pPr indent="0" marL="0">
+              <a:buNone/>
+            </a:pPr>
+            <a:r>
+              <a:rPr lang="en-US" sz="1600" b="1" dirty="0">
+                <a:solidFill>
+                  <a:srgbClr val="2D63FF"/>
+                </a:solidFill>
+                <a:latin typeface="IBM Plex Sans" pitchFamily="34" charset="0"/>
+                <a:ea typeface="IBM Plex Sans" pitchFamily="34" charset="-122"/>
+                <a:cs typeface="IBM Plex Sans" pitchFamily="34" charset="-120"/>
+              </a:rPr>
+              <a:t>Marks for arguing</a:t>
+            </a:r>
+            <a:endParaRPr lang="en-US" sz="1600" dirty="0"/>
+          </a:p>
+        </p:txBody>
+      </p:sp>
+      <p:sp>
+        <p:nvSpPr>
+          <p:cNvPr id="15" name="Text 13"/>
+          <p:cNvSpPr txBox="1"/>
+          <p:nvPr/>
+        </p:nvSpPr>
+        <p:spPr>
+          <a:xfrm>
+            <a:off x="822960" y="4361688"/>
+            <a:ext cx="4754880" cy="1005840"/>
+          </a:xfrm>
+          <a:prstGeom prst="rect">
+            <a:avLst/>
+          </a:prstGeom>
+          <a:noFill/>
+          <a:ln/>
+        </p:spPr>
+        <p:txBody>
+          <a:bodyPr wrap="square" lIns="0" tIns="0" rIns="0" bIns="0" rtlCol="0" anchor="t"/>
+          <a:lstStyle/>
+          <a:p>
+            <a:pPr indent="0" marL="0">
+              <a:lnSpc>
+                <a:spcPct val="120000"/>
+              </a:lnSpc>
+              <a:buNone/>
+            </a:pPr>
+            <a:r>
+              <a:rPr lang="en-US" sz="1300" dirty="0">
+                <a:solidFill>
+                  <a:srgbClr val="667085"/>
+                </a:solidFill>
+                <a:latin typeface="IBM Plex Sans" pitchFamily="34" charset="0"/>
+                <a:ea typeface="IBM Plex Sans" pitchFamily="34" charset="-122"/>
+                <a:cs typeface="IBM Plex Sans" pitchFamily="34" charset="-120"/>
+              </a:rPr>
+              <a:t>Impact questions are among the highest-mark questions on the paper, and the marks are for reasoning rather than recall.</a:t>
+            </a:r>
+            <a:endParaRPr lang="en-US" sz="1300" dirty="0"/>
+          </a:p>
+        </p:txBody>
+      </p:sp>
+      <p:sp>
+        <p:nvSpPr>
+          <p:cNvPr id="16" name="Shape 14"/>
+          <p:cNvSpPr/>
+          <p:nvPr/>
+        </p:nvSpPr>
+        <p:spPr>
+          <a:xfrm>
+            <a:off x="6217920" y="3794760"/>
+            <a:ext cx="5394960" cy="1737360"/>
+          </a:xfrm>
+          <a:prstGeom prst="roundRect">
+            <a:avLst>
+              <a:gd name="adj" fmla="val 6316"/>
+            </a:avLst>
+          </a:prstGeom>
+          <a:solidFill>
+            <a:srgbClr val="FFFFFF"/>
+          </a:solidFill>
+          <a:ln w="15875">
+            <a:solidFill>
+              <a:srgbClr val="08A6A6"/>
+            </a:solidFill>
+            <a:prstDash val="solid"/>
+          </a:ln>
+        </p:spPr>
+      </p:sp>
+      <p:sp>
+        <p:nvSpPr>
+          <p:cNvPr id="17" name="Text 15"/>
+          <p:cNvSpPr txBox="1"/>
+          <p:nvPr/>
+        </p:nvSpPr>
+        <p:spPr>
+          <a:xfrm>
+            <a:off x="6537960" y="3977640"/>
+            <a:ext cx="4754880" cy="365760"/>
+          </a:xfrm>
+          <a:prstGeom prst="rect">
+            <a:avLst/>
+          </a:prstGeom>
+          <a:noFill/>
+          <a:ln/>
+        </p:spPr>
+        <p:txBody>
+          <a:bodyPr wrap="square" lIns="0" tIns="0" rIns="0" bIns="0" rtlCol="0" anchor="ctr"/>
+          <a:lstStyle/>
+          <a:p>
+            <a:pPr indent="0" marL="0">
+              <a:buNone/>
+            </a:pPr>
+            <a:r>
+              <a:rPr lang="en-US" sz="1600" b="1" dirty="0">
+                <a:solidFill>
+                  <a:srgbClr val="08A6A6"/>
+                </a:solidFill>
+                <a:latin typeface="IBM Plex Sans" pitchFamily="34" charset="0"/>
+                <a:ea typeface="IBM Plex Sans" pitchFamily="34" charset="-122"/>
+                <a:cs typeface="IBM Plex Sans" pitchFamily="34" charset="-120"/>
+              </a:rPr>
+              <a:t>Stakeholders in law</a:t>
+            </a:r>
+            <a:endParaRPr lang="en-US" sz="1600" dirty="0"/>
+          </a:p>
+        </p:txBody>
+      </p:sp>
+      <p:sp>
+        <p:nvSpPr>
+          <p:cNvPr id="18" name="Text 16"/>
+          <p:cNvSpPr txBox="1"/>
+          <p:nvPr/>
+        </p:nvSpPr>
+        <p:spPr>
+          <a:xfrm>
+            <a:off x="6537960" y="4361688"/>
+            <a:ext cx="4754880" cy="1005840"/>
+          </a:xfrm>
+          <a:prstGeom prst="rect">
+            <a:avLst/>
+          </a:prstGeom>
+          <a:noFill/>
+          <a:ln/>
+        </p:spPr>
+        <p:txBody>
+          <a:bodyPr wrap="square" lIns="0" tIns="0" rIns="0" bIns="0" rtlCol="0" anchor="t"/>
+          <a:lstStyle/>
+          <a:p>
+            <a:pPr indent="0" marL="0">
+              <a:lnSpc>
+                <a:spcPct val="120000"/>
+              </a:lnSpc>
+              <a:buNone/>
+            </a:pPr>
+            <a:r>
+              <a:rPr lang="en-US" sz="1300" dirty="0">
+                <a:solidFill>
+                  <a:srgbClr val="667085"/>
+                </a:solidFill>
+                <a:latin typeface="IBM Plex Sans" pitchFamily="34" charset="0"/>
+                <a:ea typeface="IBM Plex Sans" pitchFamily="34" charset="-122"/>
+                <a:cs typeface="IBM Plex Sans" pitchFamily="34" charset="-120"/>
+              </a:rPr>
+              <a:t>Big public projects legally require consultation with the people affected, which is stakeholder analysis by another name.</a:t>
+            </a:r>
+            <a:endParaRPr lang="en-US" sz="1300" dirty="0"/>
+          </a:p>
+        </p:txBody>
+      </p:sp>
+    </p:spTree>
+  </p:cSld>
+  <p:clrMapOvr>
+    <a:masterClrMapping/>
+  </p:clrMapOvr>
+</p:sld>
+</file>
+
+<file path=ppt/slides/slide15.xml><?xml version="1.0" encoding="utf-8"?>
+<p:sld xmlns:a="http://schemas.openxmlformats.org/drawingml/2006/main" xmlns:r="http://schemas.openxmlformats.org/officeDocument/2006/relationships" xmlns:p="http://schemas.openxmlformats.org/presentationml/2006/main">
+  <p:cSld name="Slide 15">
+    <p:bg>
+      <p:bgPr>
+        <a:solidFill>
+          <a:srgbClr val="F7F7F4"/>
+        </a:solidFill>
+      </p:bgPr>
+    </p:bg>
+    <p:spTree>
+      <p:nvGrpSpPr>
+        <p:cNvPr id="1" name=""/>
+        <p:cNvGrpSpPr/>
+        <p:nvPr/>
+      </p:nvGrpSpPr>
+      <p:grpSpPr>
+        <a:xfrm>
+          <a:off x="0" y="0"/>
+          <a:ext cx="0" cy="0"/>
+          <a:chOff x="0" y="0"/>
+          <a:chExt cx="0" cy="0"/>
+        </a:xfrm>
+      </p:grpSpPr>
+      <p:sp>
+        <p:nvSpPr>
+          <p:cNvPr id="2" name="Shape 0"/>
+          <p:cNvSpPr/>
+          <p:nvPr/>
+        </p:nvSpPr>
+        <p:spPr>
+          <a:xfrm>
+            <a:off x="0" y="0"/>
+            <a:ext cx="12188952" cy="82296"/>
+          </a:xfrm>
+          <a:prstGeom prst="rect">
+            <a:avLst/>
+          </a:prstGeom>
+          <a:solidFill>
+            <a:srgbClr val="2D63FF"/>
+          </a:solidFill>
+          <a:ln/>
+        </p:spPr>
+      </p:sp>
+      <p:sp>
+        <p:nvSpPr>
+          <p:cNvPr id="3" name="Text 1"/>
+          <p:cNvSpPr txBox="1"/>
+          <p:nvPr/>
+        </p:nvSpPr>
+        <p:spPr>
+          <a:xfrm>
+            <a:off x="502920" y="6236208"/>
+            <a:ext cx="7772400" cy="365760"/>
+          </a:xfrm>
+          <a:prstGeom prst="rect">
+            <a:avLst/>
+          </a:prstGeom>
+          <a:noFill/>
+          <a:ln/>
+        </p:spPr>
+        <p:txBody>
+          <a:bodyPr wrap="square" lIns="0" tIns="0" rIns="0" bIns="0" rtlCol="0" anchor="ctr"/>
+          <a:lstStyle/>
+          <a:p>
+            <a:pPr indent="0" marL="0">
+              <a:buNone/>
+            </a:pPr>
+            <a:r>
+              <a:rPr lang="en-US" sz="1100" dirty="0">
+                <a:solidFill>
+                  <a:srgbClr val="667085"/>
+                </a:solidFill>
+                <a:latin typeface="IBM Plex Mono" pitchFamily="34" charset="0"/>
+                <a:ea typeface="IBM Plex Mono" pitchFamily="34" charset="-122"/>
+                <a:cs typeface="IBM Plex Mono" pitchFamily="34" charset="-120"/>
+              </a:rPr>
+              <a:t>1.6 Ethical, legal, cultural and environmental impacts  |  Lesson 1</a:t>
+            </a:r>
+            <a:endParaRPr lang="en-US" sz="1100" dirty="0"/>
+          </a:p>
+        </p:txBody>
+      </p:sp>
+      <p:sp>
+        <p:nvSpPr>
+          <p:cNvPr id="4" name="Text 2"/>
+          <p:cNvSpPr txBox="1"/>
+          <p:nvPr/>
+        </p:nvSpPr>
+        <p:spPr>
+          <a:xfrm>
+            <a:off x="9326880" y="6236208"/>
+            <a:ext cx="2377440" cy="365760"/>
+          </a:xfrm>
+          <a:prstGeom prst="rect">
+            <a:avLst/>
+          </a:prstGeom>
+          <a:noFill/>
+          <a:ln/>
+        </p:spPr>
+        <p:txBody>
+          <a:bodyPr wrap="square" lIns="0" tIns="0" rIns="0" bIns="0" rtlCol="0" anchor="ctr"/>
+          <a:lstStyle/>
+          <a:p>
+            <a:pPr algn="r" indent="0" marL="0">
+              <a:buNone/>
+            </a:pPr>
+            <a:r>
+              <a:rPr lang="en-US" sz="1100" dirty="0">
+                <a:solidFill>
+                  <a:srgbClr val="667085"/>
+                </a:solidFill>
+                <a:latin typeface="IBM Plex Mono" pitchFamily="34" charset="0"/>
+                <a:ea typeface="IBM Plex Mono" pitchFamily="34" charset="-122"/>
+                <a:cs typeface="IBM Plex Mono" pitchFamily="34" charset="-120"/>
+              </a:rPr>
+              <a:t>Revise 360</a:t>
+            </a:r>
+            <a:endParaRPr lang="en-US" sz="1100" dirty="0"/>
+          </a:p>
+        </p:txBody>
+      </p:sp>
+      <p:sp>
+        <p:nvSpPr>
+          <p:cNvPr id="5" name="Text 3"/>
+          <p:cNvSpPr txBox="1"/>
+          <p:nvPr/>
+        </p:nvSpPr>
+        <p:spPr>
+          <a:xfrm>
+            <a:off x="502920" y="411480"/>
+            <a:ext cx="11155680" cy="777240"/>
+          </a:xfrm>
+          <a:prstGeom prst="rect">
+            <a:avLst/>
+          </a:prstGeom>
+          <a:noFill/>
+          <a:ln/>
+        </p:spPr>
+        <p:txBody>
+          <a:bodyPr wrap="square" lIns="0" tIns="0" rIns="0" bIns="0" rtlCol="0" anchor="ctr"/>
+          <a:lstStyle/>
+          <a:p>
+            <a:pPr indent="0" marL="0">
+              <a:buNone/>
+            </a:pPr>
+            <a:r>
+              <a:rPr lang="en-US" sz="3200" b="1" dirty="0">
+                <a:solidFill>
+                  <a:srgbClr val="101828"/>
+                </a:solidFill>
+                <a:latin typeface="IBM Plex Sans" pitchFamily="34" charset="0"/>
+                <a:ea typeface="IBM Plex Sans" pitchFamily="34" charset="-122"/>
+                <a:cs typeface="IBM Plex Sans" pitchFamily="34" charset="-120"/>
+              </a:rPr>
+              <a:t>Exam practice</a:t>
+            </a:r>
+            <a:endParaRPr lang="en-US" sz="3200" dirty="0"/>
+          </a:p>
+        </p:txBody>
+      </p:sp>
+      <p:sp>
+        <p:nvSpPr>
+          <p:cNvPr id="6" name="Text 4"/>
+          <p:cNvSpPr txBox="1"/>
+          <p:nvPr/>
+        </p:nvSpPr>
+        <p:spPr>
+          <a:xfrm>
+            <a:off x="502920" y="1170432"/>
+            <a:ext cx="11155680" cy="411480"/>
+          </a:xfrm>
+          <a:prstGeom prst="rect">
+            <a:avLst/>
+          </a:prstGeom>
+          <a:noFill/>
+          <a:ln/>
+        </p:spPr>
+        <p:txBody>
+          <a:bodyPr wrap="square" lIns="0" tIns="0" rIns="0" bIns="0" rtlCol="0" anchor="ctr"/>
+          <a:lstStyle/>
+          <a:p>
+            <a:pPr indent="0" marL="0">
+              <a:buNone/>
+            </a:pPr>
+            <a:r>
+              <a:rPr lang="en-US" sz="1500" dirty="0">
+                <a:solidFill>
+                  <a:srgbClr val="667085"/>
+                </a:solidFill>
+                <a:latin typeface="IBM Plex Sans" pitchFamily="34" charset="0"/>
+                <a:ea typeface="IBM Plex Sans" pitchFamily="34" charset="-122"/>
+                <a:cs typeface="IBM Plex Sans" pitchFamily="34" charset="-120"/>
+              </a:rPr>
+              <a:t>Devices away. Answer from memory on the worksheet.</a:t>
+            </a:r>
+            <a:endParaRPr lang="en-US" sz="1500" dirty="0"/>
+          </a:p>
+        </p:txBody>
+      </p:sp>
+      <p:sp>
+        <p:nvSpPr>
+          <p:cNvPr id="7" name="Shape 5"/>
+          <p:cNvSpPr/>
+          <p:nvPr/>
+        </p:nvSpPr>
+        <p:spPr>
+          <a:xfrm>
+            <a:off x="502920" y="1828800"/>
+            <a:ext cx="11155680" cy="1097280"/>
+          </a:xfrm>
+          <a:prstGeom prst="roundRect">
+            <a:avLst>
+              <a:gd name="adj" fmla="val 10000"/>
+            </a:avLst>
+          </a:prstGeom>
+          <a:solidFill>
+            <a:srgbClr val="FFFFFF"/>
+          </a:solidFill>
+          <a:ln w="15875">
+            <a:solidFill>
+              <a:srgbClr val="D9DEE7"/>
+            </a:solidFill>
+            <a:prstDash val="solid"/>
+          </a:ln>
+        </p:spPr>
+      </p:sp>
+      <p:sp>
+        <p:nvSpPr>
+          <p:cNvPr id="8" name="Text 6"/>
+          <p:cNvSpPr txBox="1"/>
+          <p:nvPr/>
+        </p:nvSpPr>
+        <p:spPr>
+          <a:xfrm>
+            <a:off x="914400" y="1938528"/>
+            <a:ext cx="9418320" cy="877824"/>
+          </a:xfrm>
+          <a:prstGeom prst="rect">
+            <a:avLst/>
+          </a:prstGeom>
+          <a:noFill/>
+          <a:ln/>
+        </p:spPr>
+        <p:txBody>
+          <a:bodyPr wrap="square" lIns="0" tIns="0" rIns="0" bIns="0" rtlCol="0" anchor="ctr"/>
+          <a:lstStyle/>
+          <a:p>
+            <a:pPr indent="0" marL="0">
+              <a:lnSpc>
+                <a:spcPct val="118000"/>
+              </a:lnSpc>
+              <a:buNone/>
+            </a:pPr>
+            <a:r>
+              <a:rPr lang="en-US" sz="1700" dirty="0">
+                <a:solidFill>
+                  <a:srgbClr val="101828"/>
+                </a:solidFill>
+                <a:latin typeface="IBM Plex Sans" pitchFamily="34" charset="0"/>
+                <a:ea typeface="IBM Plex Sans" pitchFamily="34" charset="-122"/>
+                <a:cs typeface="IBM Plex Sans" pitchFamily="34" charset="-120"/>
+              </a:rPr>
+              <a:t>State two kinds of impact that should be considered before a new technology is introduced.</a:t>
+            </a:r>
+            <a:endParaRPr lang="en-US" sz="1700" dirty="0"/>
+          </a:p>
+        </p:txBody>
+      </p:sp>
+      <p:sp>
+        <p:nvSpPr>
+          <p:cNvPr id="9" name="Shape 7"/>
+          <p:cNvSpPr/>
+          <p:nvPr/>
+        </p:nvSpPr>
+        <p:spPr>
+          <a:xfrm>
+            <a:off x="10515600" y="2130552"/>
+            <a:ext cx="868680" cy="493776"/>
+          </a:xfrm>
+          <a:prstGeom prst="roundRect">
+            <a:avLst>
+              <a:gd name="adj" fmla="val 18519"/>
+            </a:avLst>
+          </a:prstGeom>
+          <a:solidFill>
+            <a:srgbClr val="EEF2FB"/>
+          </a:solidFill>
+          <a:ln/>
+        </p:spPr>
+      </p:sp>
+      <p:sp>
+        <p:nvSpPr>
+          <p:cNvPr id="10" name="Text 8"/>
+          <p:cNvSpPr txBox="1"/>
+          <p:nvPr/>
+        </p:nvSpPr>
+        <p:spPr>
+          <a:xfrm>
+            <a:off x="10515600" y="2130552"/>
+            <a:ext cx="868680" cy="493776"/>
+          </a:xfrm>
+          <a:prstGeom prst="rect">
+            <a:avLst/>
+          </a:prstGeom>
+          <a:noFill/>
+          <a:ln/>
+        </p:spPr>
+        <p:txBody>
+          <a:bodyPr wrap="square" lIns="0" tIns="0" rIns="0" bIns="0" rtlCol="0" anchor="ctr"/>
+          <a:lstStyle/>
+          <a:p>
+            <a:pPr algn="ctr" indent="0" marL="0">
+              <a:buNone/>
+            </a:pPr>
+            <a:r>
+              <a:rPr lang="en-US" sz="1500" b="1" dirty="0">
+                <a:solidFill>
+                  <a:srgbClr val="2D63FF"/>
+                </a:solidFill>
+                <a:latin typeface="IBM Plex Mono" pitchFamily="34" charset="0"/>
+                <a:ea typeface="IBM Plex Mono" pitchFamily="34" charset="-122"/>
+                <a:cs typeface="IBM Plex Mono" pitchFamily="34" charset="-120"/>
+              </a:rPr>
+              <a:t>[2]</a:t>
+            </a:r>
+            <a:endParaRPr lang="en-US" sz="1500" dirty="0"/>
+          </a:p>
+        </p:txBody>
+      </p:sp>
+      <p:sp>
+        <p:nvSpPr>
+          <p:cNvPr id="11" name="Shape 9"/>
+          <p:cNvSpPr/>
+          <p:nvPr/>
+        </p:nvSpPr>
+        <p:spPr>
+          <a:xfrm>
+            <a:off x="502920" y="3127248"/>
+            <a:ext cx="11155680" cy="1097280"/>
+          </a:xfrm>
+          <a:prstGeom prst="roundRect">
+            <a:avLst>
+              <a:gd name="adj" fmla="val 10000"/>
+            </a:avLst>
+          </a:prstGeom>
+          <a:solidFill>
+            <a:srgbClr val="FFFFFF"/>
+          </a:solidFill>
+          <a:ln w="15875">
+            <a:solidFill>
+              <a:srgbClr val="D9DEE7"/>
+            </a:solidFill>
+            <a:prstDash val="solid"/>
+          </a:ln>
+        </p:spPr>
+      </p:sp>
+      <p:sp>
+        <p:nvSpPr>
+          <p:cNvPr id="12" name="Text 10"/>
+          <p:cNvSpPr txBox="1"/>
+          <p:nvPr/>
+        </p:nvSpPr>
+        <p:spPr>
+          <a:xfrm>
+            <a:off x="914400" y="3236976"/>
+            <a:ext cx="9418320" cy="877824"/>
+          </a:xfrm>
+          <a:prstGeom prst="rect">
+            <a:avLst/>
+          </a:prstGeom>
+          <a:noFill/>
+          <a:ln/>
+        </p:spPr>
+        <p:txBody>
+          <a:bodyPr wrap="square" lIns="0" tIns="0" rIns="0" bIns="0" rtlCol="0" anchor="ctr"/>
+          <a:lstStyle/>
+          <a:p>
+            <a:pPr indent="0" marL="0">
+              <a:lnSpc>
+                <a:spcPct val="118000"/>
+              </a:lnSpc>
+              <a:buNone/>
+            </a:pPr>
+            <a:r>
+              <a:rPr lang="en-US" sz="1700" dirty="0">
+                <a:solidFill>
+                  <a:srgbClr val="101828"/>
+                </a:solidFill>
+                <a:latin typeface="IBM Plex Sans" pitchFamily="34" charset="0"/>
+                <a:ea typeface="IBM Plex Sans" pitchFamily="34" charset="-122"/>
+                <a:cs typeface="IBM Plex Sans" pitchFamily="34" charset="-120"/>
+              </a:rPr>
+              <a:t>Explain what is meant by a stakeholder, using an example.</a:t>
+            </a:r>
+            <a:endParaRPr lang="en-US" sz="1700" dirty="0"/>
+          </a:p>
+        </p:txBody>
+      </p:sp>
+      <p:sp>
+        <p:nvSpPr>
+          <p:cNvPr id="13" name="Shape 11"/>
+          <p:cNvSpPr/>
+          <p:nvPr/>
+        </p:nvSpPr>
+        <p:spPr>
+          <a:xfrm>
+            <a:off x="10515600" y="3429000"/>
+            <a:ext cx="868680" cy="493776"/>
+          </a:xfrm>
+          <a:prstGeom prst="roundRect">
+            <a:avLst>
+              <a:gd name="adj" fmla="val 18519"/>
+            </a:avLst>
+          </a:prstGeom>
+          <a:solidFill>
+            <a:srgbClr val="EEF2FB"/>
+          </a:solidFill>
+          <a:ln/>
+        </p:spPr>
+      </p:sp>
+      <p:sp>
+        <p:nvSpPr>
+          <p:cNvPr id="14" name="Text 12"/>
+          <p:cNvSpPr txBox="1"/>
+          <p:nvPr/>
+        </p:nvSpPr>
+        <p:spPr>
+          <a:xfrm>
+            <a:off x="10515600" y="3429000"/>
+            <a:ext cx="868680" cy="493776"/>
+          </a:xfrm>
+          <a:prstGeom prst="rect">
+            <a:avLst/>
+          </a:prstGeom>
+          <a:noFill/>
+          <a:ln/>
+        </p:spPr>
+        <p:txBody>
+          <a:bodyPr wrap="square" lIns="0" tIns="0" rIns="0" bIns="0" rtlCol="0" anchor="ctr"/>
+          <a:lstStyle/>
+          <a:p>
+            <a:pPr algn="ctr" indent="0" marL="0">
+              <a:buNone/>
+            </a:pPr>
+            <a:r>
+              <a:rPr lang="en-US" sz="1500" b="1" dirty="0">
+                <a:solidFill>
+                  <a:srgbClr val="2D63FF"/>
+                </a:solidFill>
+                <a:latin typeface="IBM Plex Mono" pitchFamily="34" charset="0"/>
+                <a:ea typeface="IBM Plex Mono" pitchFamily="34" charset="-122"/>
+                <a:cs typeface="IBM Plex Mono" pitchFamily="34" charset="-120"/>
+              </a:rPr>
+              <a:t>[2]</a:t>
+            </a:r>
+            <a:endParaRPr lang="en-US" sz="1500" dirty="0"/>
+          </a:p>
+        </p:txBody>
+      </p:sp>
+      <p:sp>
+        <p:nvSpPr>
+          <p:cNvPr id="15" name="Shape 13"/>
+          <p:cNvSpPr/>
+          <p:nvPr/>
+        </p:nvSpPr>
+        <p:spPr>
+          <a:xfrm>
+            <a:off x="502920" y="4425696"/>
+            <a:ext cx="11155680" cy="1097280"/>
+          </a:xfrm>
+          <a:prstGeom prst="roundRect">
+            <a:avLst>
+              <a:gd name="adj" fmla="val 10000"/>
+            </a:avLst>
+          </a:prstGeom>
+          <a:solidFill>
+            <a:srgbClr val="FFFFFF"/>
+          </a:solidFill>
+          <a:ln w="15875">
+            <a:solidFill>
+              <a:srgbClr val="D9DEE7"/>
+            </a:solidFill>
+            <a:prstDash val="solid"/>
+          </a:ln>
+        </p:spPr>
+      </p:sp>
+      <p:sp>
+        <p:nvSpPr>
+          <p:cNvPr id="16" name="Text 14"/>
+          <p:cNvSpPr txBox="1"/>
+          <p:nvPr/>
+        </p:nvSpPr>
+        <p:spPr>
+          <a:xfrm>
+            <a:off x="914400" y="4535424"/>
+            <a:ext cx="9418320" cy="877824"/>
+          </a:xfrm>
+          <a:prstGeom prst="rect">
+            <a:avLst/>
+          </a:prstGeom>
+          <a:noFill/>
+          <a:ln/>
+        </p:spPr>
+        <p:txBody>
+          <a:bodyPr wrap="square" lIns="0" tIns="0" rIns="0" bIns="0" rtlCol="0" anchor="ctr"/>
+          <a:lstStyle/>
+          <a:p>
+            <a:pPr indent="0" marL="0">
+              <a:lnSpc>
+                <a:spcPct val="118000"/>
+              </a:lnSpc>
+              <a:buNone/>
+            </a:pPr>
+            <a:r>
+              <a:rPr lang="en-US" sz="1700" dirty="0">
+                <a:solidFill>
+                  <a:srgbClr val="101828"/>
+                </a:solidFill>
+                <a:latin typeface="IBM Plex Sans" pitchFamily="34" charset="0"/>
+                <a:ea typeface="IBM Plex Sans" pitchFamily="34" charset="-122"/>
+                <a:cs typeface="IBM Plex Sans" pitchFamily="34" charset="-120"/>
+              </a:rPr>
+              <a:t>A council plans to put cameras with facial recognition in the town centre. Discuss the impacts of this decision.</a:t>
+            </a:r>
+            <a:endParaRPr lang="en-US" sz="1700" dirty="0"/>
+          </a:p>
+        </p:txBody>
+      </p:sp>
+      <p:sp>
+        <p:nvSpPr>
+          <p:cNvPr id="17" name="Shape 15"/>
+          <p:cNvSpPr/>
+          <p:nvPr/>
+        </p:nvSpPr>
+        <p:spPr>
+          <a:xfrm>
+            <a:off x="10515600" y="4727448"/>
+            <a:ext cx="868680" cy="493776"/>
+          </a:xfrm>
+          <a:prstGeom prst="roundRect">
+            <a:avLst>
+              <a:gd name="adj" fmla="val 18519"/>
+            </a:avLst>
+          </a:prstGeom>
+          <a:solidFill>
+            <a:srgbClr val="EEF2FB"/>
+          </a:solidFill>
+          <a:ln/>
+        </p:spPr>
+      </p:sp>
+      <p:sp>
+        <p:nvSpPr>
+          <p:cNvPr id="18" name="Text 16"/>
+          <p:cNvSpPr txBox="1"/>
+          <p:nvPr/>
+        </p:nvSpPr>
+        <p:spPr>
+          <a:xfrm>
+            <a:off x="10515600" y="4727448"/>
+            <a:ext cx="868680" cy="493776"/>
+          </a:xfrm>
+          <a:prstGeom prst="rect">
+            <a:avLst/>
+          </a:prstGeom>
+          <a:noFill/>
+          <a:ln/>
+        </p:spPr>
+        <p:txBody>
+          <a:bodyPr wrap="square" lIns="0" tIns="0" rIns="0" bIns="0" rtlCol="0" anchor="ctr"/>
+          <a:lstStyle/>
+          <a:p>
+            <a:pPr algn="ctr" indent="0" marL="0">
+              <a:buNone/>
+            </a:pPr>
+            <a:r>
+              <a:rPr lang="en-US" sz="1500" b="1" dirty="0">
+                <a:solidFill>
+                  <a:srgbClr val="2D63FF"/>
+                </a:solidFill>
+                <a:latin typeface="IBM Plex Mono" pitchFamily="34" charset="0"/>
+                <a:ea typeface="IBM Plex Mono" pitchFamily="34" charset="-122"/>
+                <a:cs typeface="IBM Plex Mono" pitchFamily="34" charset="-120"/>
+              </a:rPr>
+              <a:t>[8]</a:t>
+            </a:r>
+            <a:endParaRPr lang="en-US" sz="1500" dirty="0"/>
+          </a:p>
+        </p:txBody>
+      </p:sp>
+    </p:spTree>
+  </p:cSld>
+  <p:clrMapOvr>
+    <a:masterClrMapping/>
+  </p:clrMapOvr>
+</p:sld>
+</file>
+
+<file path=ppt/slides/slide16.xml><?xml version="1.0" encoding="utf-8"?>
+<p:sld xmlns:a="http://schemas.openxmlformats.org/drawingml/2006/main" xmlns:r="http://schemas.openxmlformats.org/officeDocument/2006/relationships" xmlns:p="http://schemas.openxmlformats.org/presentationml/2006/main">
+  <p:cSld name="Slide 16">
     <p:bg>
       <p:bgPr>
         <a:solidFill>

--- a/presentations/EL_L01_ImpactDesk_Lesson.pptx
+++ b/presentations/EL_L01_ImpactDesk_Lesson.pptx
@@ -3214,12 +3214,12 @@
         </p:nvSpPr>
         <p:spPr>
           <a:xfrm>
-            <a:off x="502920" y="1737360"/>
-            <a:ext cx="3566160" cy="2377440"/>
+            <a:off x="502920" y="1719072"/>
+            <a:ext cx="3566160" cy="2779981"/>
           </a:xfrm>
           <a:prstGeom prst="roundRect">
             <a:avLst>
-              <a:gd name="adj" fmla="val 4615"/>
+              <a:gd name="adj" fmla="val 3947"/>
             </a:avLst>
           </a:prstGeom>
           <a:solidFill>
@@ -3241,7 +3241,7 @@
         </p:nvSpPr>
         <p:spPr>
           <a:xfrm>
-            <a:off x="777240" y="1901952"/>
+            <a:off x="777240" y="1883664"/>
             <a:ext cx="3017520" cy="292608"/>
           </a:xfrm>
           <a:prstGeom prst="rect">
@@ -3280,8 +3280,8 @@
         </p:nvSpPr>
         <p:spPr>
           <a:xfrm>
-            <a:off x="777240" y="2249424"/>
-            <a:ext cx="3017520" cy="1719072"/>
+            <a:off x="777240" y="2231136"/>
+            <a:ext cx="3017520" cy="2121613"/>
           </a:xfrm>
           <a:prstGeom prst="rect">
             <a:avLst/>
@@ -3351,12 +3351,12 @@
         </p:nvSpPr>
         <p:spPr>
           <a:xfrm>
-            <a:off x="4297680" y="1737360"/>
-            <a:ext cx="3566160" cy="2377440"/>
+            <a:off x="4297680" y="1719072"/>
+            <a:ext cx="3566160" cy="2779981"/>
           </a:xfrm>
           <a:prstGeom prst="roundRect">
             <a:avLst>
-              <a:gd name="adj" fmla="val 4615"/>
+              <a:gd name="adj" fmla="val 3947"/>
             </a:avLst>
           </a:prstGeom>
           <a:solidFill>
@@ -3378,7 +3378,7 @@
         </p:nvSpPr>
         <p:spPr>
           <a:xfrm>
-            <a:off x="4572000" y="1901952"/>
+            <a:off x="4572000" y="1883664"/>
             <a:ext cx="3017520" cy="292608"/>
           </a:xfrm>
           <a:prstGeom prst="rect">
@@ -3417,8 +3417,8 @@
         </p:nvSpPr>
         <p:spPr>
           <a:xfrm>
-            <a:off x="4572000" y="2249424"/>
-            <a:ext cx="3017520" cy="1719072"/>
+            <a:off x="4572000" y="2231136"/>
+            <a:ext cx="3017520" cy="2121613"/>
           </a:xfrm>
           <a:prstGeom prst="rect">
             <a:avLst/>
@@ -3517,12 +3517,12 @@
         </p:nvSpPr>
         <p:spPr>
           <a:xfrm>
-            <a:off x="8092440" y="1737360"/>
-            <a:ext cx="3566160" cy="2377440"/>
+            <a:off x="8092440" y="1719072"/>
+            <a:ext cx="3566160" cy="2779981"/>
           </a:xfrm>
           <a:prstGeom prst="roundRect">
             <a:avLst>
-              <a:gd name="adj" fmla="val 4615"/>
+              <a:gd name="adj" fmla="val 3947"/>
             </a:avLst>
           </a:prstGeom>
           <a:solidFill>
@@ -3544,7 +3544,7 @@
         </p:nvSpPr>
         <p:spPr>
           <a:xfrm>
-            <a:off x="8366760" y="1901952"/>
+            <a:off x="8366760" y="1883664"/>
             <a:ext cx="3017520" cy="292608"/>
           </a:xfrm>
           <a:prstGeom prst="rect">
@@ -3583,8 +3583,8 @@
         </p:nvSpPr>
         <p:spPr>
           <a:xfrm>
-            <a:off x="8366760" y="2249424"/>
-            <a:ext cx="3017520" cy="1719072"/>
+            <a:off x="8366760" y="2231136"/>
+            <a:ext cx="3017520" cy="2121613"/>
           </a:xfrm>
           <a:prstGeom prst="rect">
             <a:avLst/>
@@ -3723,12 +3723,12 @@
         </p:nvSpPr>
         <p:spPr>
           <a:xfrm>
-            <a:off x="502920" y="4251960"/>
-            <a:ext cx="11155680" cy="2057400"/>
+            <a:off x="502920" y="4636213"/>
+            <a:ext cx="11155680" cy="1700579"/>
           </a:xfrm>
           <a:prstGeom prst="roundRect">
             <a:avLst>
-              <a:gd name="adj" fmla="val 5333"/>
+              <a:gd name="adj" fmla="val 6452"/>
             </a:avLst>
           </a:prstGeom>
           <a:solidFill>
@@ -3750,7 +3750,7 @@
         </p:nvSpPr>
         <p:spPr>
           <a:xfrm>
-            <a:off x="868680" y="4416552"/>
+            <a:off x="868680" y="4800805"/>
             <a:ext cx="10424160" cy="292608"/>
           </a:xfrm>
           <a:prstGeom prst="rect">
@@ -3789,8 +3789,8 @@
         </p:nvSpPr>
         <p:spPr>
           <a:xfrm>
-            <a:off x="868680" y="4764024"/>
-            <a:ext cx="10424160" cy="1463040"/>
+            <a:off x="868680" y="5148277"/>
+            <a:ext cx="10424160" cy="1078787"/>
           </a:xfrm>
           <a:prstGeom prst="rect">
             <a:avLst/>
@@ -3809,7 +3809,7 @@
               <a:buNone/>
             </a:pPr>
             <a:r>
-              <a:rPr lang="en-US" sz="1500" dirty="0">
+              <a:rPr lang="en-US" sz="1200" dirty="0">
                 <a:solidFill>
                   <a:srgbClr val="101828"/>
                 </a:solidFill>
@@ -3819,7 +3819,7 @@
               </a:rPr>
               <a:t>"Closing the branch raises an ethical issue, because some customers cannot use the app at all. Older customers and those without a smartphone lose the only way they can bank, while the bank and most of its customers gain a cheaper service open at any hour. There is a cultural impact too: the town centre loses another reason to visit it. On balance the closure is hard to justify until the bank has provided for the customers it leaves behind, because those worst affected have fewest alternatives."</a:t>
             </a:r>
-            <a:endParaRPr lang="en-US" sz="1500" dirty="0"/>
+            <a:endParaRPr lang="en-US" sz="1200" dirty="0"/>
           </a:p>
         </p:txBody>
       </p:sp>
@@ -4062,7 +4062,7 @@
         <p:spPr>
           <a:xfrm>
             <a:off x="502920" y="1097280"/>
-            <a:ext cx="11155680" cy="1005840"/>
+            <a:ext cx="11155680" cy="914400"/>
           </a:xfrm>
           <a:prstGeom prst="rect">
             <a:avLst/>
@@ -4103,7 +4103,7 @@
         </p:nvSpPr>
         <p:spPr>
           <a:xfrm>
-            <a:off x="502920" y="2331720"/>
+            <a:off x="502920" y="2148840"/>
             <a:ext cx="11155680" cy="731520"/>
           </a:xfrm>
           <a:prstGeom prst="roundRect">
@@ -4130,7 +4130,7 @@
         </p:nvSpPr>
         <p:spPr>
           <a:xfrm>
-            <a:off x="777240" y="2478024"/>
+            <a:off x="777240" y="2295144"/>
             <a:ext cx="438912" cy="438912"/>
           </a:xfrm>
           <a:prstGeom prst="roundRect">
@@ -4152,7 +4152,7 @@
         </p:nvSpPr>
         <p:spPr>
           <a:xfrm>
-            <a:off x="777240" y="2478024"/>
+            <a:off x="777240" y="2295144"/>
             <a:ext cx="438912" cy="438912"/>
           </a:xfrm>
           <a:prstGeom prst="rect">
@@ -4191,7 +4191,7 @@
         </p:nvSpPr>
         <p:spPr>
           <a:xfrm>
-            <a:off x="1417320" y="2331720"/>
+            <a:off x="1417320" y="2148840"/>
             <a:ext cx="10058400" cy="731520"/>
           </a:xfrm>
           <a:prstGeom prst="rect">
@@ -4233,7 +4233,7 @@
         </p:nvSpPr>
         <p:spPr>
           <a:xfrm>
-            <a:off x="502920" y="3200400"/>
+            <a:off x="502920" y="3017520"/>
             <a:ext cx="11155680" cy="731520"/>
           </a:xfrm>
           <a:prstGeom prst="roundRect">
@@ -4260,7 +4260,7 @@
         </p:nvSpPr>
         <p:spPr>
           <a:xfrm>
-            <a:off x="777240" y="3346704"/>
+            <a:off x="777240" y="3163824"/>
             <a:ext cx="438912" cy="438912"/>
           </a:xfrm>
           <a:prstGeom prst="roundRect">
@@ -4282,7 +4282,7 @@
         </p:nvSpPr>
         <p:spPr>
           <a:xfrm>
-            <a:off x="777240" y="3346704"/>
+            <a:off x="777240" y="3163824"/>
             <a:ext cx="438912" cy="438912"/>
           </a:xfrm>
           <a:prstGeom prst="rect">
@@ -4321,7 +4321,7 @@
         </p:nvSpPr>
         <p:spPr>
           <a:xfrm>
-            <a:off x="1417320" y="3200400"/>
+            <a:off x="1417320" y="3017520"/>
             <a:ext cx="10058400" cy="731520"/>
           </a:xfrm>
           <a:prstGeom prst="rect">
@@ -4363,7 +4363,7 @@
         </p:nvSpPr>
         <p:spPr>
           <a:xfrm>
-            <a:off x="502920" y="4069080"/>
+            <a:off x="502920" y="3886200"/>
             <a:ext cx="11155680" cy="731520"/>
           </a:xfrm>
           <a:prstGeom prst="roundRect">
@@ -4390,7 +4390,7 @@
         </p:nvSpPr>
         <p:spPr>
           <a:xfrm>
-            <a:off x="777240" y="4215384"/>
+            <a:off x="777240" y="4032504"/>
             <a:ext cx="438912" cy="438912"/>
           </a:xfrm>
           <a:prstGeom prst="roundRect">
@@ -4412,7 +4412,7 @@
         </p:nvSpPr>
         <p:spPr>
           <a:xfrm>
-            <a:off x="777240" y="4215384"/>
+            <a:off x="777240" y="4032504"/>
             <a:ext cx="438912" cy="438912"/>
           </a:xfrm>
           <a:prstGeom prst="rect">
@@ -4451,7 +4451,7 @@
         </p:nvSpPr>
         <p:spPr>
           <a:xfrm>
-            <a:off x="1417320" y="4069080"/>
+            <a:off x="1417320" y="3886200"/>
             <a:ext cx="10058400" cy="731520"/>
           </a:xfrm>
           <a:prstGeom prst="rect">
@@ -4493,7 +4493,7 @@
         </p:nvSpPr>
         <p:spPr>
           <a:xfrm>
-            <a:off x="502920" y="4937760"/>
+            <a:off x="502920" y="4754880"/>
             <a:ext cx="11155680" cy="731520"/>
           </a:xfrm>
           <a:prstGeom prst="roundRect">
@@ -4520,7 +4520,7 @@
         </p:nvSpPr>
         <p:spPr>
           <a:xfrm>
-            <a:off x="777240" y="5084064"/>
+            <a:off x="777240" y="4901184"/>
             <a:ext cx="438912" cy="438912"/>
           </a:xfrm>
           <a:prstGeom prst="roundRect">
@@ -4542,7 +4542,7 @@
         </p:nvSpPr>
         <p:spPr>
           <a:xfrm>
-            <a:off x="777240" y="5084064"/>
+            <a:off x="777240" y="4901184"/>
             <a:ext cx="438912" cy="438912"/>
           </a:xfrm>
           <a:prstGeom prst="rect">
@@ -4581,7 +4581,7 @@
         </p:nvSpPr>
         <p:spPr>
           <a:xfrm>
-            <a:off x="1417320" y="4937760"/>
+            <a:off x="1417320" y="4754880"/>
             <a:ext cx="10058400" cy="731520"/>
           </a:xfrm>
           <a:prstGeom prst="rect">
